--- a/docs/ISE_Review1_Final.pptx
+++ b/docs/ISE_Review1_Final.pptx
@@ -18,9 +18,10 @@
     <p:sldId id="266" r:id="rId12"/>
     <p:sldId id="267" r:id="rId13"/>
     <p:sldId id="268" r:id="rId14"/>
+    <p:sldId id="269" r:id="rId15"/>
   </p:sldIdLst>
   <p:notesMasterIdLst>
-    <p:notesMasterId r:id="rId15"/>
+    <p:notesMasterId r:id="rId16"/>
   </p:notesMasterIdLst>
   <p:sldSz cx="12191695" cy="6858000"/>
   <p:notesSz cx="6858000" cy="12191695"/>
@@ -698,12 +699,11 @@
           <a:p>
             <a:r>
               <a:rPr lang="en-US" dirty="0"/>
-              <a:t>This slide is the credibility slide. Do not rush it.
-"Every number in this deck survived an attempt to break it." Then pick two.
-The contamination one: an overnight script merged dev into train. We caught it because a baseline scored 0.3743 against a training-time 0.1397 — a gap too big to be a metric difference. We retracted the headline and the beats-human-annotation claim, and re-ran on disjoint shards.
-The selection one: choosing the best epoch by dev IoU had INVERTED the v1-versus-v2 conclusion. Not inflated it — inverted it.
-Also worth a sentence: two of our own proposed improvements, the free-space and geometric bases, lost to a random control of equal size and were dropped.
-Land it: two claims retracted, two ideas rejected by their own controls. That is why the results that remain are worth stating.</a:t>
+              <a:t>This is the strongest downstream result and it came from re-tuning, not from a new model.
+The first inpainting run reused 64 px of dilation from the compositing experiment, where an over-large mask costs nothing because it can only subtract. Under inpainting the mask decides what gets REGENERATED, so too much dilation destroys content that should have been preserved. Collateral came out at 39.1% — worse than whole-frame editing.
+Sweeping threshold and dilation jointly, 20 cells, found 0.3 and 32 px: +39.5% net at 22.2% collateral. That is below whole-frame's 24.2%, so we beat the status quo on both quantities now.
+The shape is the real finding. Every row has its own peak and the optimal dilation rises with the threshold. A higher threshold gives a smaller raw mask which needs more dilation to reach the same coverage, so the two trade along a ridge. That is exactly why sweeping dilation alone returned a local optimum.
+If asked why not more samples: 60 per cell, one editor, one guidance setting. Say so.</a:t>
             </a:r>
             <a:endParaRPr lang="en-US" dirty="0"/>
           </a:p>
@@ -791,11 +791,12 @@
           <a:p>
             <a:r>
               <a:rPr lang="en-US" dirty="0"/>
-              <a:t>Where this goes, and the bar each step has to clear.
-Month 1 is DONE — that is this review. All 51 shards, 8,306 turns, 24 seeded runs, 0.1718 to 0.2065.
-Month 2 is the real research problem and I want to be precise about it. We fitted coefficients directly to ground truth by least squares. That is an upper bound on what ANY predictor can do with these 32 prototypes: 0.212 for insertion, against 0.433 for removal. Insertion — the case this project exists for — has the lowest ceiling, because FastSAM's prototypes were trained to segment objects, and objects are not empty space.
-More data cannot pass that. We are at 56 percent of it. So month 2 attacks the BASIS, not the head — and any new basis must beat a random basis of equal size, because that is the test our last attempt failed.
-Month 3 is editing and evaluation for Review 2.</a:t>
+              <a:t>This slide is the credibility slide. Do not rush it.
+"Every number in this deck survived an attempt to break it." Then pick two.
+The contamination one: an overnight script merged dev into train. We caught it because a baseline scored 0.3743 against a training-time 0.1397 — a gap too big to be a metric difference. We retracted the headline and the beats-human-annotation claim, and re-ran on disjoint shards.
+The selection one: choosing the best epoch by dev IoU had INVERTED the v1-versus-v2 conclusion. Not inflated it — inverted it.
+Also worth a sentence: two of our own proposed improvements, the free-space and geometric bases, lost to a random control of equal size and were dropped.
+Land it: two claims retracted, two ideas rejected by their own controls. That is why the results that remain are worth stating.</a:t>
             </a:r>
             <a:endParaRPr lang="en-US" dirty="0"/>
           </a:p>
@@ -883,6 +884,98 @@
           <a:p>
             <a:r>
               <a:rPr lang="en-US" dirty="0"/>
+              <a:t>Where this goes, and the bar each step has to clear.
+Month 1 is DONE — that is this review. All 51 shards, 8,306 turns, 24 seeded runs, 0.1718 to 0.2065.
+Month 2 is the real research problem and I want to be precise about it. We fitted coefficients directly to ground truth by least squares. That is an upper bound on what ANY predictor can do with these 32 prototypes: 0.212 for insertion, against 0.433 for removal. Insertion — the case this project exists for — has the lowest ceiling, because FastSAM's prototypes were trained to segment objects, and objects are not empty space.
+More data cannot pass that. We are at 56 percent of it. So month 2 attacks the BASIS, not the head — and any new basis must beat a random basis of equal size, because that is the test our last attempt failed.
+Month 3 is editing and evaluation for Review 2.</a:t>
+            </a:r>
+            <a:endParaRPr lang="en-US" dirty="0"/>
+          </a:p>
+        </p:txBody>
+      </p:sp>
+      <p:sp>
+        <p:nvSpPr>
+          <p:cNvPr id="4" name="Slide Number Placeholder 3"/>
+          <p:cNvSpPr>
+            <a:spLocks noGrp="1"/>
+          </p:cNvSpPr>
+          <p:nvPr>
+            <p:ph type="sldNum" sz="quarter" idx="10"/>
+          </p:nvPr>
+        </p:nvSpPr>
+        <p:spPr/>
+        <p:txBody>
+          <a:bodyPr/>
+          <a:lstStyle/>
+          <a:p>
+            <a:fld id="{F7021451-1387-4CA6-816F-3879F97B5CBC}" type="slidenum">
+              <a:rPr lang="en-US"/>
+              <a:t>13</a:t>
+            </a:fld>
+            <a:endParaRPr lang="en-US"/>
+          </a:p>
+        </p:txBody>
+      </p:sp>
+    </p:spTree>
+    <p:extLst>
+      <p:ext uri="{BB962C8B-B14F-4D97-AF65-F5344CB8AC3E}">
+        <p14:creationId xmlns:p14="http://schemas.microsoft.com/office/powerpoint/2010/main" val="1024086991"/>
+      </p:ext>
+    </p:extLst>
+  </p:cSld>
+  <p:clrMapOvr>
+    <a:masterClrMapping/>
+  </p:clrMapOvr>
+</p:notes>
+</file>
+
+<file path=ppt/notesSlides/notesSlide14.xml><?xml version="1.0" encoding="utf-8"?>
+<p:notes xmlns:a="http://schemas.openxmlformats.org/drawingml/2006/main" xmlns:r="http://schemas.openxmlformats.org/officeDocument/2006/relationships" xmlns:p="http://schemas.openxmlformats.org/presentationml/2006/main">
+  <p:cSld>
+    <p:spTree>
+      <p:nvGrpSpPr>
+        <p:cNvPr id="1" name=""/>
+        <p:cNvGrpSpPr/>
+        <p:nvPr/>
+      </p:nvGrpSpPr>
+      <p:grpSpPr>
+        <a:xfrm>
+          <a:off x="0" y="0"/>
+          <a:ext cx="0" cy="0"/>
+          <a:chOff x="0" y="0"/>
+          <a:chExt cx="0" cy="0"/>
+        </a:xfrm>
+      </p:grpSpPr>
+      <p:sp>
+        <p:nvSpPr>
+          <p:cNvPr id="2" name="Slide Image Placeholder 1"/>
+          <p:cNvSpPr>
+            <a:spLocks noGrp="1" noRot="1" noChangeAspect="1"/>
+          </p:cNvSpPr>
+          <p:nvPr>
+            <p:ph type="sldImg"/>
+          </p:nvPr>
+        </p:nvSpPr>
+        <p:spPr/>
+      </p:sp>
+      <p:sp>
+        <p:nvSpPr>
+          <p:cNvPr id="3" name="Notes Placeholder 2"/>
+          <p:cNvSpPr>
+            <a:spLocks noGrp="1"/>
+          </p:cNvSpPr>
+          <p:nvPr>
+            <p:ph type="body" idx="1"/>
+          </p:nvPr>
+        </p:nvSpPr>
+        <p:spPr/>
+        <p:txBody>
+          <a:bodyPr/>
+          <a:lstStyle/>
+          <a:p>
+            <a:r>
+              <a:rPr lang="en-US" dirty="0"/>
               <a:t>Closing.
 "Everything reproduces. One repository, 13 experiments, every result seeded, every figure regenerated from committed JSON. It runs on a MacBook."
 Then stop talking and take questions.
@@ -913,7 +1006,7 @@
           <a:p>
             <a:fld id="{F7021451-1387-4CA6-816F-3879F97B5CBC}" type="slidenum">
               <a:rPr lang="en-US"/>
-              <a:t>13</a:t>
+              <a:t>14</a:t>
             </a:fld>
             <a:endParaRPr lang="en-US"/>
           </a:p>
@@ -4199,6 +4292,2851 @@
                 <a:ea typeface="Georgia" pitchFamily="34" charset="-122"/>
                 <a:cs typeface="Georgia" pitchFamily="34" charset="-120"/>
               </a:rPr>
+              <a:t>Stage 2, part two</a:t>
+            </a:r>
+            <a:endParaRPr lang="en-US" sz="1050" dirty="0"/>
+          </a:p>
+        </p:txBody>
+      </p:sp>
+      <p:sp>
+        <p:nvSpPr>
+          <p:cNvPr id="3" name="Text 1"/>
+          <p:cNvSpPr/>
+          <p:nvPr/>
+        </p:nvSpPr>
+        <p:spPr>
+          <a:xfrm>
+            <a:off x="777240" y="603504"/>
+            <a:ext cx="10637215" cy="493776"/>
+          </a:xfrm>
+          <a:prstGeom prst="rect">
+            <a:avLst/>
+          </a:prstGeom>
+          <a:noFill/>
+          <a:ln/>
+        </p:spPr>
+        <p:txBody>
+          <a:bodyPr wrap="square" lIns="0" tIns="0" rIns="0" bIns="0" rtlCol="0" anchor="ctr"/>
+          <a:lstStyle/>
+          <a:p>
+            <a:pPr indent="0" marL="0">
+              <a:buNone/>
+            </a:pPr>
+            <a:r>
+              <a:rPr lang="en-US" sz="2500" dirty="0">
+                <a:solidFill>
+                  <a:srgbClr val="1B1A17"/>
+                </a:solidFill>
+                <a:latin typeface="Georgia" pitchFamily="34" charset="0"/>
+                <a:ea typeface="Georgia" pitchFamily="34" charset="-122"/>
+                <a:cs typeface="Georgia" pitchFamily="34" charset="-120"/>
+              </a:rPr>
+              <a:t>With a real inpainting model, localization is worth 5.8×</a:t>
+            </a:r>
+            <a:endParaRPr lang="en-US" sz="2500" dirty="0"/>
+          </a:p>
+        </p:txBody>
+      </p:sp>
+      <p:sp>
+        <p:nvSpPr>
+          <p:cNvPr id="4" name="Text 2"/>
+          <p:cNvSpPr/>
+          <p:nvPr/>
+        </p:nvSpPr>
+        <p:spPr>
+          <a:xfrm>
+            <a:off x="777240" y="1133856"/>
+            <a:ext cx="10637215" cy="274320"/>
+          </a:xfrm>
+          <a:prstGeom prst="rect">
+            <a:avLst/>
+          </a:prstGeom>
+          <a:noFill/>
+          <a:ln/>
+        </p:spPr>
+        <p:txBody>
+          <a:bodyPr wrap="square" lIns="0" tIns="0" rIns="0" bIns="0" rtlCol="0" anchor="ctr"/>
+          <a:lstStyle/>
+          <a:p>
+            <a:pPr indent="0" marL="0">
+              <a:buNone/>
+            </a:pPr>
+            <a:r>
+              <a:rPr lang="en-US" sz="1200" dirty="0">
+                <a:solidFill>
+                  <a:srgbClr val="6B6963"/>
+                </a:solidFill>
+                <a:latin typeface="Georgia" pitchFamily="34" charset="0"/>
+                <a:ea typeface="Georgia" pitchFamily="34" charset="-122"/>
+                <a:cs typeface="Georgia" pitchFamily="34" charset="-120"/>
+              </a:rPr>
+              <a:t>60 held-out dev samples · the mask now decides what gets regenerated, not just what is kept</a:t>
+            </a:r>
+            <a:endParaRPr lang="en-US" sz="1200" dirty="0"/>
+          </a:p>
+        </p:txBody>
+      </p:sp>
+      <p:sp>
+        <p:nvSpPr>
+          <p:cNvPr id="5" name="Shape 3"/>
+          <p:cNvSpPr/>
+          <p:nvPr/>
+        </p:nvSpPr>
+        <p:spPr>
+          <a:xfrm>
+            <a:off x="777240" y="1463040"/>
+            <a:ext cx="10637215" cy="7315"/>
+          </a:xfrm>
+          <a:prstGeom prst="rect">
+            <a:avLst/>
+          </a:prstGeom>
+          <a:solidFill>
+            <a:srgbClr val="1B1A17"/>
+          </a:solidFill>
+          <a:ln/>
+        </p:spPr>
+      </p:sp>
+      <p:graphicFrame>
+        <p:nvGraphicFramePr>
+          <p:cNvPr id="12" name="Table 0"/>
+          <p:cNvGraphicFramePr>
+            <a:graphicFrameLocks noGrp="1"/>
+          </p:cNvGraphicFramePr>
+          <p:nvPr>
+            <p:extLst>
+              <p:ext uri="{D42A27DB-BD31-4B8C-83A1-F6EECF244321}">
+                <p14:modId xmlns:p14="http://schemas.microsoft.com/office/powerpoint/2010/main" val="1579011935"/>
+              </p:ext>
+            </p:extLst>
+          </p:nvPr>
+        </p:nvGraphicFramePr>
+        <p:xfrm>
+          <a:off x="777240" y="1645920"/>
+          <a:ext cx="10637215" cy="914400"/>
+        </p:xfrm>
+        <a:graphic>
+          <a:graphicData uri="http://schemas.openxmlformats.org/drawingml/2006/table">
+            <a:tbl>
+              <a:tblPr/>
+              <a:tblGrid>
+                <a:gridCol w="3840480"/>
+                <a:gridCol w="2286000"/>
+                <a:gridCol w="2286000"/>
+                <a:gridCol w="2221992"/>
+              </a:tblGrid>
+              <a:tr h="402336">
+                <a:tc>
+                  <a:txBody>
+                    <a:bodyPr/>
+                    <a:lstStyle/>
+                    <a:p>
+                      <a:pPr indent="0" marL="0">
+                        <a:buNone/>
+                      </a:pPr>
+                      <a:r>
+                        <a:rPr lang="en-US" sz="1150" b="1" dirty="0">
+                          <a:solidFill>
+                            <a:srgbClr val="1B1A17"/>
+                          </a:solidFill>
+                          <a:latin typeface="Georgia" pitchFamily="34" charset="0"/>
+                          <a:ea typeface="Georgia" pitchFamily="34" charset="-122"/>
+                          <a:cs typeface="Georgia" pitchFamily="34" charset="-120"/>
+                        </a:rPr>
+                        <a:t>gating mask</a:t>
+                      </a:r>
+                      <a:endParaRPr lang="en-US" sz="1150" dirty="0">
+                        <a:latin typeface="Georgia" charset="0"/>
+                        <a:ea typeface="Georgia" charset="0"/>
+                        <a:cs typeface="Georgia" charset="0"/>
+                      </a:endParaRPr>
+                    </a:p>
+                  </a:txBody>
+                  <a:tcPr marL="50800" marR="50800" marT="50800" marB="50800" anchor="t">
+                    <a:lnL w="0" cap="flat" cmpd="sng" algn="ctr">
+                      <a:noFill/>
+                    </a:lnL>
+                    <a:lnR w="0" cap="flat" cmpd="sng" algn="ctr">
+                      <a:noFill/>
+                    </a:lnR>
+                    <a:lnT w="13970" cap="flat" cmpd="sng" algn="ctr">
+                      <a:solidFill>
+                        <a:srgbClr val="1B1A17"/>
+                      </a:solidFill>
+                      <a:prstDash val="solid"/>
+                      <a:round/>
+                      <a:headEnd type="none" w="med" len="med"/>
+                      <a:tailEnd type="none" w="med" len="med"/>
+                    </a:lnT>
+                    <a:lnB w="7620" cap="flat" cmpd="sng" algn="ctr">
+                      <a:solidFill>
+                        <a:srgbClr val="1B1A17"/>
+                      </a:solidFill>
+                      <a:prstDash val="solid"/>
+                      <a:round/>
+                      <a:headEnd type="none" w="med" len="med"/>
+                      <a:tailEnd type="none" w="med" len="med"/>
+                    </a:lnB>
+                  </a:tcPr>
+                </a:tc>
+                <a:tc>
+                  <a:txBody>
+                    <a:bodyPr/>
+                    <a:lstStyle/>
+                    <a:p>
+                      <a:pPr algn="ctr" indent="0" marL="0">
+                        <a:buNone/>
+                      </a:pPr>
+                      <a:r>
+                        <a:rPr lang="en-US" sz="1150" b="1" dirty="0">
+                          <a:solidFill>
+                            <a:srgbClr val="1B1A17"/>
+                          </a:solidFill>
+                          <a:latin typeface="Georgia" pitchFamily="34" charset="0"/>
+                          <a:ea typeface="Georgia" pitchFamily="34" charset="-122"/>
+                          <a:cs typeface="Georgia" pitchFamily="34" charset="-120"/>
+                        </a:rPr>
+                        <a:t>recall ↑</a:t>
+                      </a:r>
+                      <a:endParaRPr lang="en-US" sz="1150" dirty="0">
+                        <a:latin typeface="Georgia" charset="0"/>
+                        <a:ea typeface="Georgia" charset="0"/>
+                        <a:cs typeface="Georgia" charset="0"/>
+                      </a:endParaRPr>
+                    </a:p>
+                  </a:txBody>
+                  <a:tcPr marL="50800" marR="50800" marT="50800" marB="50800" anchor="t">
+                    <a:lnL w="0" cap="flat" cmpd="sng" algn="ctr">
+                      <a:noFill/>
+                    </a:lnL>
+                    <a:lnR w="0" cap="flat" cmpd="sng" algn="ctr">
+                      <a:noFill/>
+                    </a:lnR>
+                    <a:lnT w="13970" cap="flat" cmpd="sng" algn="ctr">
+                      <a:solidFill>
+                        <a:srgbClr val="1B1A17"/>
+                      </a:solidFill>
+                      <a:prstDash val="solid"/>
+                      <a:round/>
+                      <a:headEnd type="none" w="med" len="med"/>
+                      <a:tailEnd type="none" w="med" len="med"/>
+                    </a:lnT>
+                    <a:lnB w="7620" cap="flat" cmpd="sng" algn="ctr">
+                      <a:solidFill>
+                        <a:srgbClr val="1B1A17"/>
+                      </a:solidFill>
+                      <a:prstDash val="solid"/>
+                      <a:round/>
+                      <a:headEnd type="none" w="med" len="med"/>
+                      <a:tailEnd type="none" w="med" len="med"/>
+                    </a:lnB>
+                  </a:tcPr>
+                </a:tc>
+                <a:tc>
+                  <a:txBody>
+                    <a:bodyPr/>
+                    <a:lstStyle/>
+                    <a:p>
+                      <a:pPr algn="ctr" indent="0" marL="0">
+                        <a:buNone/>
+                      </a:pPr>
+                      <a:r>
+                        <a:rPr lang="en-US" sz="1150" b="1" dirty="0">
+                          <a:solidFill>
+                            <a:srgbClr val="1B1A17"/>
+                          </a:solidFill>
+                          <a:latin typeface="Georgia" pitchFamily="34" charset="0"/>
+                          <a:ea typeface="Georgia" pitchFamily="34" charset="-122"/>
+                          <a:cs typeface="Georgia" pitchFamily="34" charset="-120"/>
+                        </a:rPr>
+                        <a:t>collateral ↓</a:t>
+                      </a:r>
+                      <a:endParaRPr lang="en-US" sz="1150" dirty="0">
+                        <a:latin typeface="Georgia" charset="0"/>
+                        <a:ea typeface="Georgia" charset="0"/>
+                        <a:cs typeface="Georgia" charset="0"/>
+                      </a:endParaRPr>
+                    </a:p>
+                  </a:txBody>
+                  <a:tcPr marL="50800" marR="50800" marT="50800" marB="50800" anchor="t">
+                    <a:lnL w="0" cap="flat" cmpd="sng" algn="ctr">
+                      <a:noFill/>
+                    </a:lnL>
+                    <a:lnR w="0" cap="flat" cmpd="sng" algn="ctr">
+                      <a:noFill/>
+                    </a:lnR>
+                    <a:lnT w="13970" cap="flat" cmpd="sng" algn="ctr">
+                      <a:solidFill>
+                        <a:srgbClr val="1B1A17"/>
+                      </a:solidFill>
+                      <a:prstDash val="solid"/>
+                      <a:round/>
+                      <a:headEnd type="none" w="med" len="med"/>
+                      <a:tailEnd type="none" w="med" len="med"/>
+                    </a:lnT>
+                    <a:lnB w="7620" cap="flat" cmpd="sng" algn="ctr">
+                      <a:solidFill>
+                        <a:srgbClr val="1B1A17"/>
+                      </a:solidFill>
+                      <a:prstDash val="solid"/>
+                      <a:round/>
+                      <a:headEnd type="none" w="med" len="med"/>
+                      <a:tailEnd type="none" w="med" len="med"/>
+                    </a:lnB>
+                  </a:tcPr>
+                </a:tc>
+                <a:tc>
+                  <a:txBody>
+                    <a:bodyPr/>
+                    <a:lstStyle/>
+                    <a:p>
+                      <a:pPr algn="ctr" indent="0" marL="0">
+                        <a:buNone/>
+                      </a:pPr>
+                      <a:r>
+                        <a:rPr lang="en-US" sz="1150" b="1" dirty="0">
+                          <a:solidFill>
+                            <a:srgbClr val="1B1A17"/>
+                          </a:solidFill>
+                          <a:latin typeface="Georgia" pitchFamily="34" charset="0"/>
+                          <a:ea typeface="Georgia" pitchFamily="34" charset="-122"/>
+                          <a:cs typeface="Georgia" pitchFamily="34" charset="-120"/>
+                        </a:rPr>
+                        <a:t>net ↑</a:t>
+                      </a:r>
+                      <a:endParaRPr lang="en-US" sz="1150" dirty="0">
+                        <a:latin typeface="Georgia" charset="0"/>
+                        <a:ea typeface="Georgia" charset="0"/>
+                        <a:cs typeface="Georgia" charset="0"/>
+                      </a:endParaRPr>
+                    </a:p>
+                  </a:txBody>
+                  <a:tcPr marL="50800" marR="50800" marT="50800" marB="50800" anchor="t">
+                    <a:lnL w="0" cap="flat" cmpd="sng" algn="ctr">
+                      <a:noFill/>
+                    </a:lnL>
+                    <a:lnR w="0" cap="flat" cmpd="sng" algn="ctr">
+                      <a:noFill/>
+                    </a:lnR>
+                    <a:lnT w="13970" cap="flat" cmpd="sng" algn="ctr">
+                      <a:solidFill>
+                        <a:srgbClr val="1B1A17"/>
+                      </a:solidFill>
+                      <a:prstDash val="solid"/>
+                      <a:round/>
+                      <a:headEnd type="none" w="med" len="med"/>
+                      <a:tailEnd type="none" w="med" len="med"/>
+                    </a:lnT>
+                    <a:lnB w="7620" cap="flat" cmpd="sng" algn="ctr">
+                      <a:solidFill>
+                        <a:srgbClr val="1B1A17"/>
+                      </a:solidFill>
+                      <a:prstDash val="solid"/>
+                      <a:round/>
+                      <a:headEnd type="none" w="med" len="med"/>
+                      <a:tailEnd type="none" w="med" len="med"/>
+                    </a:lnB>
+                  </a:tcPr>
+                </a:tc>
+              </a:tr>
+              <a:tr h="402336">
+                <a:tc>
+                  <a:txBody>
+                    <a:bodyPr/>
+                    <a:lstStyle/>
+                    <a:p>
+                      <a:pPr indent="0" marL="0">
+                        <a:buNone/>
+                      </a:pPr>
+                      <a:r>
+                        <a:rPr lang="en-US" sz="1150" dirty="0">
+                          <a:solidFill>
+                            <a:srgbClr val="1B1A17"/>
+                          </a:solidFill>
+                          <a:latin typeface="Georgia" pitchFamily="34" charset="0"/>
+                          <a:ea typeface="Georgia" pitchFamily="34" charset="-122"/>
+                          <a:cs typeface="Georgia" pitchFamily="34" charset="-120"/>
+                        </a:rPr>
+                        <a:t>none — whole frame</a:t>
+                      </a:r>
+                      <a:endParaRPr lang="en-US" sz="1150" dirty="0">
+                        <a:latin typeface="Georgia" charset="0"/>
+                        <a:ea typeface="Georgia" charset="0"/>
+                        <a:cs typeface="Georgia" charset="0"/>
+                      </a:endParaRPr>
+                    </a:p>
+                  </a:txBody>
+                  <a:tcPr marL="50800" marR="50800" marT="50800" marB="50800" anchor="t">
+                    <a:lnL w="0" cap="flat" cmpd="sng" algn="ctr">
+                      <a:noFill/>
+                    </a:lnL>
+                    <a:lnR w="0" cap="flat" cmpd="sng" algn="ctr">
+                      <a:noFill/>
+                    </a:lnR>
+                    <a:lnT w="0" cap="flat" cmpd="sng" algn="ctr">
+                      <a:noFill/>
+                    </a:lnT>
+                    <a:lnB w="0" cap="flat" cmpd="sng" algn="ctr">
+                      <a:solidFill>
+                        <a:srgbClr val="FFFFFF"/>
+                      </a:solidFill>
+                      <a:prstDash val="solid"/>
+                      <a:round/>
+                      <a:headEnd type="none" w="med" len="med"/>
+                      <a:tailEnd type="none" w="med" len="med"/>
+                    </a:lnB>
+                  </a:tcPr>
+                </a:tc>
+                <a:tc>
+                  <a:txBody>
+                    <a:bodyPr/>
+                    <a:lstStyle/>
+                    <a:p>
+                      <a:pPr algn="ctr" indent="0" marL="0">
+                        <a:buNone/>
+                      </a:pPr>
+                      <a:r>
+                        <a:rPr lang="en-US" sz="1150" dirty="0">
+                          <a:solidFill>
+                            <a:srgbClr val="1B1A17"/>
+                          </a:solidFill>
+                          <a:latin typeface="Georgia" pitchFamily="34" charset="0"/>
+                          <a:ea typeface="Georgia" pitchFamily="34" charset="-122"/>
+                          <a:cs typeface="Georgia" pitchFamily="34" charset="-120"/>
+                        </a:rPr>
+                        <a:t>33.3%</a:t>
+                      </a:r>
+                      <a:endParaRPr lang="en-US" sz="1150" dirty="0">
+                        <a:latin typeface="Georgia" charset="0"/>
+                        <a:ea typeface="Georgia" charset="0"/>
+                        <a:cs typeface="Georgia" charset="0"/>
+                      </a:endParaRPr>
+                    </a:p>
+                  </a:txBody>
+                  <a:tcPr marL="50800" marR="50800" marT="50800" marB="50800" anchor="t">
+                    <a:lnL w="0" cap="flat" cmpd="sng" algn="ctr">
+                      <a:noFill/>
+                    </a:lnL>
+                    <a:lnR w="0" cap="flat" cmpd="sng" algn="ctr">
+                      <a:noFill/>
+                    </a:lnR>
+                    <a:lnT w="0" cap="flat" cmpd="sng" algn="ctr">
+                      <a:noFill/>
+                    </a:lnT>
+                    <a:lnB w="0" cap="flat" cmpd="sng" algn="ctr">
+                      <a:solidFill>
+                        <a:srgbClr val="FFFFFF"/>
+                      </a:solidFill>
+                      <a:prstDash val="solid"/>
+                      <a:round/>
+                      <a:headEnd type="none" w="med" len="med"/>
+                      <a:tailEnd type="none" w="med" len="med"/>
+                    </a:lnB>
+                  </a:tcPr>
+                </a:tc>
+                <a:tc>
+                  <a:txBody>
+                    <a:bodyPr/>
+                    <a:lstStyle/>
+                    <a:p>
+                      <a:pPr algn="ctr" indent="0" marL="0">
+                        <a:buNone/>
+                      </a:pPr>
+                      <a:r>
+                        <a:rPr lang="en-US" sz="1150" dirty="0">
+                          <a:solidFill>
+                            <a:srgbClr val="1B1A17"/>
+                          </a:solidFill>
+                          <a:latin typeface="Georgia" pitchFamily="34" charset="0"/>
+                          <a:ea typeface="Georgia" pitchFamily="34" charset="-122"/>
+                          <a:cs typeface="Georgia" pitchFamily="34" charset="-120"/>
+                        </a:rPr>
+                        <a:t>24.2%</a:t>
+                      </a:r>
+                      <a:endParaRPr lang="en-US" sz="1150" dirty="0">
+                        <a:latin typeface="Georgia" charset="0"/>
+                        <a:ea typeface="Georgia" charset="0"/>
+                        <a:cs typeface="Georgia" charset="0"/>
+                      </a:endParaRPr>
+                    </a:p>
+                  </a:txBody>
+                  <a:tcPr marL="50800" marR="50800" marT="50800" marB="50800" anchor="t">
+                    <a:lnL w="0" cap="flat" cmpd="sng" algn="ctr">
+                      <a:noFill/>
+                    </a:lnL>
+                    <a:lnR w="0" cap="flat" cmpd="sng" algn="ctr">
+                      <a:noFill/>
+                    </a:lnR>
+                    <a:lnT w="0" cap="flat" cmpd="sng" algn="ctr">
+                      <a:noFill/>
+                    </a:lnT>
+                    <a:lnB w="0" cap="flat" cmpd="sng" algn="ctr">
+                      <a:solidFill>
+                        <a:srgbClr val="FFFFFF"/>
+                      </a:solidFill>
+                      <a:prstDash val="solid"/>
+                      <a:round/>
+                      <a:headEnd type="none" w="med" len="med"/>
+                      <a:tailEnd type="none" w="med" len="med"/>
+                    </a:lnB>
+                  </a:tcPr>
+                </a:tc>
+                <a:tc>
+                  <a:txBody>
+                    <a:bodyPr/>
+                    <a:lstStyle/>
+                    <a:p>
+                      <a:pPr algn="ctr" indent="0" marL="0">
+                        <a:buNone/>
+                      </a:pPr>
+                      <a:r>
+                        <a:rPr lang="en-US" sz="1150" dirty="0">
+                          <a:solidFill>
+                            <a:srgbClr val="1B1A17"/>
+                          </a:solidFill>
+                          <a:latin typeface="Georgia" pitchFamily="34" charset="0"/>
+                          <a:ea typeface="Georgia" pitchFamily="34" charset="-122"/>
+                          <a:cs typeface="Georgia" pitchFamily="34" charset="-120"/>
+                        </a:rPr>
+                        <a:t>+9.1%</a:t>
+                      </a:r>
+                      <a:endParaRPr lang="en-US" sz="1150" dirty="0">
+                        <a:latin typeface="Georgia" charset="0"/>
+                        <a:ea typeface="Georgia" charset="0"/>
+                        <a:cs typeface="Georgia" charset="0"/>
+                      </a:endParaRPr>
+                    </a:p>
+                  </a:txBody>
+                  <a:tcPr marL="50800" marR="50800" marT="50800" marB="50800" anchor="t">
+                    <a:lnL w="0" cap="flat" cmpd="sng" algn="ctr">
+                      <a:noFill/>
+                    </a:lnL>
+                    <a:lnR w="0" cap="flat" cmpd="sng" algn="ctr">
+                      <a:noFill/>
+                    </a:lnR>
+                    <a:lnT w="0" cap="flat" cmpd="sng" algn="ctr">
+                      <a:noFill/>
+                    </a:lnT>
+                    <a:lnB w="0" cap="flat" cmpd="sng" algn="ctr">
+                      <a:solidFill>
+                        <a:srgbClr val="FFFFFF"/>
+                      </a:solidFill>
+                      <a:prstDash val="solid"/>
+                      <a:round/>
+                      <a:headEnd type="none" w="med" len="med"/>
+                      <a:tailEnd type="none" w="med" len="med"/>
+                    </a:lnB>
+                  </a:tcPr>
+                </a:tc>
+              </a:tr>
+              <a:tr h="402336">
+                <a:tc>
+                  <a:txBody>
+                    <a:bodyPr/>
+                    <a:lstStyle/>
+                    <a:p>
+                      <a:pPr indent="0" marL="0">
+                        <a:buNone/>
+                      </a:pPr>
+                      <a:r>
+                        <a:rPr lang="en-US" sz="1150" b="1" dirty="0">
+                          <a:solidFill>
+                            <a:srgbClr val="1B1A17"/>
+                          </a:solidFill>
+                          <a:latin typeface="Georgia" pitchFamily="34" charset="0"/>
+                          <a:ea typeface="Georgia" pitchFamily="34" charset="-122"/>
+                          <a:cs typeface="Georgia" pitchFamily="34" charset="-120"/>
+                        </a:rPr>
+                        <a:t>ours, tuned (thr 0.3, 32 px)</a:t>
+                      </a:r>
+                      <a:endParaRPr lang="en-US" sz="1150" dirty="0">
+                        <a:latin typeface="Georgia" charset="0"/>
+                        <a:ea typeface="Georgia" charset="0"/>
+                        <a:cs typeface="Georgia" charset="0"/>
+                      </a:endParaRPr>
+                    </a:p>
+                  </a:txBody>
+                  <a:tcPr marL="50800" marR="50800" marT="50800" marB="50800" anchor="t">
+                    <a:lnL w="0" cap="flat" cmpd="sng" algn="ctr">
+                      <a:noFill/>
+                    </a:lnL>
+                    <a:lnR w="0" cap="flat" cmpd="sng" algn="ctr">
+                      <a:noFill/>
+                    </a:lnR>
+                    <a:lnT w="0" cap="flat" cmpd="sng" algn="ctr">
+                      <a:noFill/>
+                    </a:lnT>
+                    <a:lnB w="0" cap="flat" cmpd="sng" algn="ctr">
+                      <a:solidFill>
+                        <a:srgbClr val="FFFFFF"/>
+                      </a:solidFill>
+                      <a:prstDash val="solid"/>
+                      <a:round/>
+                      <a:headEnd type="none" w="med" len="med"/>
+                      <a:tailEnd type="none" w="med" len="med"/>
+                    </a:lnB>
+                  </a:tcPr>
+                </a:tc>
+                <a:tc>
+                  <a:txBody>
+                    <a:bodyPr/>
+                    <a:lstStyle/>
+                    <a:p>
+                      <a:pPr algn="ctr" indent="0" marL="0">
+                        <a:buNone/>
+                      </a:pPr>
+                      <a:r>
+                        <a:rPr lang="en-US" sz="1150" b="1" dirty="0">
+                          <a:solidFill>
+                            <a:srgbClr val="1B1A17"/>
+                          </a:solidFill>
+                          <a:latin typeface="Georgia" pitchFamily="34" charset="0"/>
+                          <a:ea typeface="Georgia" pitchFamily="34" charset="-122"/>
+                          <a:cs typeface="Georgia" pitchFamily="34" charset="-120"/>
+                        </a:rPr>
+                        <a:t>61.7%</a:t>
+                      </a:r>
+                      <a:endParaRPr lang="en-US" sz="1150" dirty="0">
+                        <a:latin typeface="Georgia" charset="0"/>
+                        <a:ea typeface="Georgia" charset="0"/>
+                        <a:cs typeface="Georgia" charset="0"/>
+                      </a:endParaRPr>
+                    </a:p>
+                  </a:txBody>
+                  <a:tcPr marL="50800" marR="50800" marT="50800" marB="50800" anchor="t">
+                    <a:lnL w="0" cap="flat" cmpd="sng" algn="ctr">
+                      <a:noFill/>
+                    </a:lnL>
+                    <a:lnR w="0" cap="flat" cmpd="sng" algn="ctr">
+                      <a:noFill/>
+                    </a:lnR>
+                    <a:lnT w="0" cap="flat" cmpd="sng" algn="ctr">
+                      <a:noFill/>
+                    </a:lnT>
+                    <a:lnB w="0" cap="flat" cmpd="sng" algn="ctr">
+                      <a:solidFill>
+                        <a:srgbClr val="FFFFFF"/>
+                      </a:solidFill>
+                      <a:prstDash val="solid"/>
+                      <a:round/>
+                      <a:headEnd type="none" w="med" len="med"/>
+                      <a:tailEnd type="none" w="med" len="med"/>
+                    </a:lnB>
+                  </a:tcPr>
+                </a:tc>
+                <a:tc>
+                  <a:txBody>
+                    <a:bodyPr/>
+                    <a:lstStyle/>
+                    <a:p>
+                      <a:pPr algn="ctr" indent="0" marL="0">
+                        <a:buNone/>
+                      </a:pPr>
+                      <a:r>
+                        <a:rPr lang="en-US" sz="1150" b="1" dirty="0">
+                          <a:solidFill>
+                            <a:srgbClr val="1B1A17"/>
+                          </a:solidFill>
+                          <a:latin typeface="Georgia" pitchFamily="34" charset="0"/>
+                          <a:ea typeface="Georgia" pitchFamily="34" charset="-122"/>
+                          <a:cs typeface="Georgia" pitchFamily="34" charset="-120"/>
+                        </a:rPr>
+                        <a:t>22.2%</a:t>
+                      </a:r>
+                      <a:endParaRPr lang="en-US" sz="1150" dirty="0">
+                        <a:latin typeface="Georgia" charset="0"/>
+                        <a:ea typeface="Georgia" charset="0"/>
+                        <a:cs typeface="Georgia" charset="0"/>
+                      </a:endParaRPr>
+                    </a:p>
+                  </a:txBody>
+                  <a:tcPr marL="50800" marR="50800" marT="50800" marB="50800" anchor="t">
+                    <a:lnL w="0" cap="flat" cmpd="sng" algn="ctr">
+                      <a:noFill/>
+                    </a:lnL>
+                    <a:lnR w="0" cap="flat" cmpd="sng" algn="ctr">
+                      <a:noFill/>
+                    </a:lnR>
+                    <a:lnT w="0" cap="flat" cmpd="sng" algn="ctr">
+                      <a:noFill/>
+                    </a:lnT>
+                    <a:lnB w="0" cap="flat" cmpd="sng" algn="ctr">
+                      <a:solidFill>
+                        <a:srgbClr val="FFFFFF"/>
+                      </a:solidFill>
+                      <a:prstDash val="solid"/>
+                      <a:round/>
+                      <a:headEnd type="none" w="med" len="med"/>
+                      <a:tailEnd type="none" w="med" len="med"/>
+                    </a:lnB>
+                  </a:tcPr>
+                </a:tc>
+                <a:tc>
+                  <a:txBody>
+                    <a:bodyPr/>
+                    <a:lstStyle/>
+                    <a:p>
+                      <a:pPr algn="ctr" indent="0" marL="0">
+                        <a:buNone/>
+                      </a:pPr>
+                      <a:r>
+                        <a:rPr lang="en-US" sz="1150" b="1" dirty="0">
+                          <a:solidFill>
+                            <a:srgbClr val="1B1A17"/>
+                          </a:solidFill>
+                          <a:latin typeface="Georgia" pitchFamily="34" charset="0"/>
+                          <a:ea typeface="Georgia" pitchFamily="34" charset="-122"/>
+                          <a:cs typeface="Georgia" pitchFamily="34" charset="-120"/>
+                        </a:rPr>
+                        <a:t>+39.5%</a:t>
+                      </a:r>
+                      <a:endParaRPr lang="en-US" sz="1150" dirty="0">
+                        <a:latin typeface="Georgia" charset="0"/>
+                        <a:ea typeface="Georgia" charset="0"/>
+                        <a:cs typeface="Georgia" charset="0"/>
+                      </a:endParaRPr>
+                    </a:p>
+                  </a:txBody>
+                  <a:tcPr marL="50800" marR="50800" marT="50800" marB="50800" anchor="t">
+                    <a:lnL w="0" cap="flat" cmpd="sng" algn="ctr">
+                      <a:noFill/>
+                    </a:lnL>
+                    <a:lnR w="0" cap="flat" cmpd="sng" algn="ctr">
+                      <a:noFill/>
+                    </a:lnR>
+                    <a:lnT w="0" cap="flat" cmpd="sng" algn="ctr">
+                      <a:noFill/>
+                    </a:lnT>
+                    <a:lnB w="0" cap="flat" cmpd="sng" algn="ctr">
+                      <a:solidFill>
+                        <a:srgbClr val="FFFFFF"/>
+                      </a:solidFill>
+                      <a:prstDash val="solid"/>
+                      <a:round/>
+                      <a:headEnd type="none" w="med" len="med"/>
+                      <a:tailEnd type="none" w="med" len="med"/>
+                    </a:lnB>
+                  </a:tcPr>
+                </a:tc>
+              </a:tr>
+              <a:tr h="402336">
+                <a:tc>
+                  <a:txBody>
+                    <a:bodyPr/>
+                    <a:lstStyle/>
+                    <a:p>
+                      <a:pPr indent="0" marL="0">
+                        <a:buNone/>
+                      </a:pPr>
+                      <a:r>
+                        <a:rPr lang="en-US" sz="1150" dirty="0">
+                          <a:solidFill>
+                            <a:srgbClr val="1B1A17"/>
+                          </a:solidFill>
+                          <a:latin typeface="Georgia" pitchFamily="34" charset="0"/>
+                          <a:ea typeface="Georgia" pitchFamily="34" charset="-122"/>
+                          <a:cs typeface="Georgia" pitchFamily="34" charset="-120"/>
+                        </a:rPr>
+                        <a:t>MagicBrush human mask</a:t>
+                      </a:r>
+                      <a:endParaRPr lang="en-US" sz="1150" dirty="0">
+                        <a:latin typeface="Georgia" charset="0"/>
+                        <a:ea typeface="Georgia" charset="0"/>
+                        <a:cs typeface="Georgia" charset="0"/>
+                      </a:endParaRPr>
+                    </a:p>
+                  </a:txBody>
+                  <a:tcPr marL="50800" marR="50800" marT="50800" marB="50800" anchor="t">
+                    <a:lnL w="0" cap="flat" cmpd="sng" algn="ctr">
+                      <a:noFill/>
+                    </a:lnL>
+                    <a:lnR w="0" cap="flat" cmpd="sng" algn="ctr">
+                      <a:noFill/>
+                    </a:lnR>
+                    <a:lnT w="0" cap="flat" cmpd="sng" algn="ctr">
+                      <a:noFill/>
+                    </a:lnT>
+                    <a:lnB w="0" cap="flat" cmpd="sng" algn="ctr">
+                      <a:solidFill>
+                        <a:srgbClr val="FFFFFF"/>
+                      </a:solidFill>
+                      <a:prstDash val="solid"/>
+                      <a:round/>
+                      <a:headEnd type="none" w="med" len="med"/>
+                      <a:tailEnd type="none" w="med" len="med"/>
+                    </a:lnB>
+                  </a:tcPr>
+                </a:tc>
+                <a:tc>
+                  <a:txBody>
+                    <a:bodyPr/>
+                    <a:lstStyle/>
+                    <a:p>
+                      <a:pPr algn="ctr" indent="0" marL="0">
+                        <a:buNone/>
+                      </a:pPr>
+                      <a:r>
+                        <a:rPr lang="en-US" sz="1150" dirty="0">
+                          <a:solidFill>
+                            <a:srgbClr val="1B1A17"/>
+                          </a:solidFill>
+                          <a:latin typeface="Georgia" pitchFamily="34" charset="0"/>
+                          <a:ea typeface="Georgia" pitchFamily="34" charset="-122"/>
+                          <a:cs typeface="Georgia" pitchFamily="34" charset="-120"/>
+                        </a:rPr>
+                        <a:t>78.4%</a:t>
+                      </a:r>
+                      <a:endParaRPr lang="en-US" sz="1150" dirty="0">
+                        <a:latin typeface="Georgia" charset="0"/>
+                        <a:ea typeface="Georgia" charset="0"/>
+                        <a:cs typeface="Georgia" charset="0"/>
+                      </a:endParaRPr>
+                    </a:p>
+                  </a:txBody>
+                  <a:tcPr marL="50800" marR="50800" marT="50800" marB="50800" anchor="t">
+                    <a:lnL w="0" cap="flat" cmpd="sng" algn="ctr">
+                      <a:noFill/>
+                    </a:lnL>
+                    <a:lnR w="0" cap="flat" cmpd="sng" algn="ctr">
+                      <a:noFill/>
+                    </a:lnR>
+                    <a:lnT w="0" cap="flat" cmpd="sng" algn="ctr">
+                      <a:noFill/>
+                    </a:lnT>
+                    <a:lnB w="0" cap="flat" cmpd="sng" algn="ctr">
+                      <a:solidFill>
+                        <a:srgbClr val="FFFFFF"/>
+                      </a:solidFill>
+                      <a:prstDash val="solid"/>
+                      <a:round/>
+                      <a:headEnd type="none" w="med" len="med"/>
+                      <a:tailEnd type="none" w="med" len="med"/>
+                    </a:lnB>
+                  </a:tcPr>
+                </a:tc>
+                <a:tc>
+                  <a:txBody>
+                    <a:bodyPr/>
+                    <a:lstStyle/>
+                    <a:p>
+                      <a:pPr algn="ctr" indent="0" marL="0">
+                        <a:buNone/>
+                      </a:pPr>
+                      <a:r>
+                        <a:rPr lang="en-US" sz="1150" dirty="0">
+                          <a:solidFill>
+                            <a:srgbClr val="1B1A17"/>
+                          </a:solidFill>
+                          <a:latin typeface="Georgia" pitchFamily="34" charset="0"/>
+                          <a:ea typeface="Georgia" pitchFamily="34" charset="-122"/>
+                          <a:cs typeface="Georgia" pitchFamily="34" charset="-120"/>
+                        </a:rPr>
+                        <a:t>51.7%</a:t>
+                      </a:r>
+                      <a:endParaRPr lang="en-US" sz="1150" dirty="0">
+                        <a:latin typeface="Georgia" charset="0"/>
+                        <a:ea typeface="Georgia" charset="0"/>
+                        <a:cs typeface="Georgia" charset="0"/>
+                      </a:endParaRPr>
+                    </a:p>
+                  </a:txBody>
+                  <a:tcPr marL="50800" marR="50800" marT="50800" marB="50800" anchor="t">
+                    <a:lnL w="0" cap="flat" cmpd="sng" algn="ctr">
+                      <a:noFill/>
+                    </a:lnL>
+                    <a:lnR w="0" cap="flat" cmpd="sng" algn="ctr">
+                      <a:noFill/>
+                    </a:lnR>
+                    <a:lnT w="0" cap="flat" cmpd="sng" algn="ctr">
+                      <a:noFill/>
+                    </a:lnT>
+                    <a:lnB w="0" cap="flat" cmpd="sng" algn="ctr">
+                      <a:solidFill>
+                        <a:srgbClr val="FFFFFF"/>
+                      </a:solidFill>
+                      <a:prstDash val="solid"/>
+                      <a:round/>
+                      <a:headEnd type="none" w="med" len="med"/>
+                      <a:tailEnd type="none" w="med" len="med"/>
+                    </a:lnB>
+                  </a:tcPr>
+                </a:tc>
+                <a:tc>
+                  <a:txBody>
+                    <a:bodyPr/>
+                    <a:lstStyle/>
+                    <a:p>
+                      <a:pPr algn="ctr" indent="0" marL="0">
+                        <a:buNone/>
+                      </a:pPr>
+                      <a:r>
+                        <a:rPr lang="en-US" sz="1150" dirty="0">
+                          <a:solidFill>
+                            <a:srgbClr val="1B1A17"/>
+                          </a:solidFill>
+                          <a:latin typeface="Georgia" pitchFamily="34" charset="0"/>
+                          <a:ea typeface="Georgia" pitchFamily="34" charset="-122"/>
+                          <a:cs typeface="Georgia" pitchFamily="34" charset="-120"/>
+                        </a:rPr>
+                        <a:t>+26.8%</a:t>
+                      </a:r>
+                      <a:endParaRPr lang="en-US" sz="1150" dirty="0">
+                        <a:latin typeface="Georgia" charset="0"/>
+                        <a:ea typeface="Georgia" charset="0"/>
+                        <a:cs typeface="Georgia" charset="0"/>
+                      </a:endParaRPr>
+                    </a:p>
+                  </a:txBody>
+                  <a:tcPr marL="50800" marR="50800" marT="50800" marB="50800" anchor="t">
+                    <a:lnL w="0" cap="flat" cmpd="sng" algn="ctr">
+                      <a:noFill/>
+                    </a:lnL>
+                    <a:lnR w="0" cap="flat" cmpd="sng" algn="ctr">
+                      <a:noFill/>
+                    </a:lnR>
+                    <a:lnT w="0" cap="flat" cmpd="sng" algn="ctr">
+                      <a:noFill/>
+                    </a:lnT>
+                    <a:lnB w="0" cap="flat" cmpd="sng" algn="ctr">
+                      <a:solidFill>
+                        <a:srgbClr val="FFFFFF"/>
+                      </a:solidFill>
+                      <a:prstDash val="solid"/>
+                      <a:round/>
+                      <a:headEnd type="none" w="med" len="med"/>
+                      <a:tailEnd type="none" w="med" len="med"/>
+                    </a:lnB>
+                  </a:tcPr>
+                </a:tc>
+              </a:tr>
+              <a:tr h="402336">
+                <a:tc>
+                  <a:txBody>
+                    <a:bodyPr/>
+                    <a:lstStyle/>
+                    <a:p>
+                      <a:pPr indent="0" marL="0">
+                        <a:buNone/>
+                      </a:pPr>
+                      <a:r>
+                        <a:rPr lang="en-US" sz="1150" dirty="0">
+                          <a:solidFill>
+                            <a:srgbClr val="1B1A17"/>
+                          </a:solidFill>
+                          <a:latin typeface="Georgia" pitchFamily="34" charset="0"/>
+                          <a:ea typeface="Georgia" pitchFamily="34" charset="-122"/>
+                          <a:cs typeface="Georgia" pitchFamily="34" charset="-120"/>
+                        </a:rPr>
+                        <a:t>ground-truth region</a:t>
+                      </a:r>
+                      <a:endParaRPr lang="en-US" sz="1150" dirty="0">
+                        <a:latin typeface="Georgia" charset="0"/>
+                        <a:ea typeface="Georgia" charset="0"/>
+                        <a:cs typeface="Georgia" charset="0"/>
+                      </a:endParaRPr>
+                    </a:p>
+                  </a:txBody>
+                  <a:tcPr marL="50800" marR="50800" marT="50800" marB="50800" anchor="t">
+                    <a:lnL w="0" cap="flat" cmpd="sng" algn="ctr">
+                      <a:noFill/>
+                    </a:lnL>
+                    <a:lnR w="0" cap="flat" cmpd="sng" algn="ctr">
+                      <a:noFill/>
+                    </a:lnR>
+                    <a:lnT w="0" cap="flat" cmpd="sng" algn="ctr">
+                      <a:noFill/>
+                    </a:lnT>
+                    <a:lnB w="13970" cap="flat" cmpd="sng" algn="ctr">
+                      <a:solidFill>
+                        <a:srgbClr val="1B1A17"/>
+                      </a:solidFill>
+                      <a:prstDash val="solid"/>
+                      <a:round/>
+                      <a:headEnd type="none" w="med" len="med"/>
+                      <a:tailEnd type="none" w="med" len="med"/>
+                    </a:lnB>
+                  </a:tcPr>
+                </a:tc>
+                <a:tc>
+                  <a:txBody>
+                    <a:bodyPr/>
+                    <a:lstStyle/>
+                    <a:p>
+                      <a:pPr algn="ctr" indent="0" marL="0">
+                        <a:buNone/>
+                      </a:pPr>
+                      <a:r>
+                        <a:rPr lang="en-US" sz="1150" dirty="0">
+                          <a:solidFill>
+                            <a:srgbClr val="1B1A17"/>
+                          </a:solidFill>
+                          <a:latin typeface="Georgia" pitchFamily="34" charset="0"/>
+                          <a:ea typeface="Georgia" pitchFamily="34" charset="-122"/>
+                          <a:cs typeface="Georgia" pitchFamily="34" charset="-120"/>
+                        </a:rPr>
+                        <a:t>59.4%</a:t>
+                      </a:r>
+                      <a:endParaRPr lang="en-US" sz="1150" dirty="0">
+                        <a:latin typeface="Georgia" charset="0"/>
+                        <a:ea typeface="Georgia" charset="0"/>
+                        <a:cs typeface="Georgia" charset="0"/>
+                      </a:endParaRPr>
+                    </a:p>
+                  </a:txBody>
+                  <a:tcPr marL="50800" marR="50800" marT="50800" marB="50800" anchor="t">
+                    <a:lnL w="0" cap="flat" cmpd="sng" algn="ctr">
+                      <a:noFill/>
+                    </a:lnL>
+                    <a:lnR w="0" cap="flat" cmpd="sng" algn="ctr">
+                      <a:noFill/>
+                    </a:lnR>
+                    <a:lnT w="0" cap="flat" cmpd="sng" algn="ctr">
+                      <a:noFill/>
+                    </a:lnT>
+                    <a:lnB w="13970" cap="flat" cmpd="sng" algn="ctr">
+                      <a:solidFill>
+                        <a:srgbClr val="1B1A17"/>
+                      </a:solidFill>
+                      <a:prstDash val="solid"/>
+                      <a:round/>
+                      <a:headEnd type="none" w="med" len="med"/>
+                      <a:tailEnd type="none" w="med" len="med"/>
+                    </a:lnB>
+                  </a:tcPr>
+                </a:tc>
+                <a:tc>
+                  <a:txBody>
+                    <a:bodyPr/>
+                    <a:lstStyle/>
+                    <a:p>
+                      <a:pPr algn="ctr" indent="0" marL="0">
+                        <a:buNone/>
+                      </a:pPr>
+                      <a:r>
+                        <a:rPr lang="en-US" sz="1150" dirty="0">
+                          <a:solidFill>
+                            <a:srgbClr val="1B1A17"/>
+                          </a:solidFill>
+                          <a:latin typeface="Georgia" pitchFamily="34" charset="0"/>
+                          <a:ea typeface="Georgia" pitchFamily="34" charset="-122"/>
+                          <a:cs typeface="Georgia" pitchFamily="34" charset="-120"/>
+                        </a:rPr>
+                        <a:t>6.4%</a:t>
+                      </a:r>
+                      <a:endParaRPr lang="en-US" sz="1150" dirty="0">
+                        <a:latin typeface="Georgia" charset="0"/>
+                        <a:ea typeface="Georgia" charset="0"/>
+                        <a:cs typeface="Georgia" charset="0"/>
+                      </a:endParaRPr>
+                    </a:p>
+                  </a:txBody>
+                  <a:tcPr marL="50800" marR="50800" marT="50800" marB="50800" anchor="t">
+                    <a:lnL w="0" cap="flat" cmpd="sng" algn="ctr">
+                      <a:noFill/>
+                    </a:lnL>
+                    <a:lnR w="0" cap="flat" cmpd="sng" algn="ctr">
+                      <a:noFill/>
+                    </a:lnR>
+                    <a:lnT w="0" cap="flat" cmpd="sng" algn="ctr">
+                      <a:noFill/>
+                    </a:lnT>
+                    <a:lnB w="13970" cap="flat" cmpd="sng" algn="ctr">
+                      <a:solidFill>
+                        <a:srgbClr val="1B1A17"/>
+                      </a:solidFill>
+                      <a:prstDash val="solid"/>
+                      <a:round/>
+                      <a:headEnd type="none" w="med" len="med"/>
+                      <a:tailEnd type="none" w="med" len="med"/>
+                    </a:lnB>
+                  </a:tcPr>
+                </a:tc>
+                <a:tc>
+                  <a:txBody>
+                    <a:bodyPr/>
+                    <a:lstStyle/>
+                    <a:p>
+                      <a:pPr algn="ctr" indent="0" marL="0">
+                        <a:buNone/>
+                      </a:pPr>
+                      <a:r>
+                        <a:rPr lang="en-US" sz="1150" dirty="0">
+                          <a:solidFill>
+                            <a:srgbClr val="1B1A17"/>
+                          </a:solidFill>
+                          <a:latin typeface="Georgia" pitchFamily="34" charset="0"/>
+                          <a:ea typeface="Georgia" pitchFamily="34" charset="-122"/>
+                          <a:cs typeface="Georgia" pitchFamily="34" charset="-120"/>
+                        </a:rPr>
+                        <a:t>+53.0%</a:t>
+                      </a:r>
+                      <a:endParaRPr lang="en-US" sz="1150" dirty="0">
+                        <a:latin typeface="Georgia" charset="0"/>
+                        <a:ea typeface="Georgia" charset="0"/>
+                        <a:cs typeface="Georgia" charset="0"/>
+                      </a:endParaRPr>
+                    </a:p>
+                  </a:txBody>
+                  <a:tcPr marL="50800" marR="50800" marT="50800" marB="50800" anchor="t">
+                    <a:lnL w="0" cap="flat" cmpd="sng" algn="ctr">
+                      <a:noFill/>
+                    </a:lnL>
+                    <a:lnR w="0" cap="flat" cmpd="sng" algn="ctr">
+                      <a:noFill/>
+                    </a:lnR>
+                    <a:lnT w="0" cap="flat" cmpd="sng" algn="ctr">
+                      <a:noFill/>
+                    </a:lnT>
+                    <a:lnB w="13970" cap="flat" cmpd="sng" algn="ctr">
+                      <a:solidFill>
+                        <a:srgbClr val="1B1A17"/>
+                      </a:solidFill>
+                      <a:prstDash val="solid"/>
+                      <a:round/>
+                      <a:headEnd type="none" w="med" len="med"/>
+                      <a:tailEnd type="none" w="med" len="med"/>
+                    </a:lnB>
+                  </a:tcPr>
+                </a:tc>
+              </a:tr>
+            </a:tbl>
+          </a:graphicData>
+        </a:graphic>
+      </p:graphicFrame>
+      <p:sp>
+        <p:nvSpPr>
+          <p:cNvPr id="7" name="Shape 4"/>
+          <p:cNvSpPr/>
+          <p:nvPr/>
+        </p:nvSpPr>
+        <p:spPr>
+          <a:xfrm>
+            <a:off x="777240" y="3794760"/>
+            <a:ext cx="10637215" cy="5486"/>
+          </a:xfrm>
+          <a:prstGeom prst="rect">
+            <a:avLst/>
+          </a:prstGeom>
+          <a:solidFill>
+            <a:srgbClr val="C9C6BD"/>
+          </a:solidFill>
+          <a:ln/>
+        </p:spPr>
+      </p:sp>
+      <p:sp>
+        <p:nvSpPr>
+          <p:cNvPr id="8" name="Text 5"/>
+          <p:cNvSpPr/>
+          <p:nvPr/>
+        </p:nvSpPr>
+        <p:spPr>
+          <a:xfrm>
+            <a:off x="1069848" y="3986784"/>
+            <a:ext cx="10051999" cy="566928"/>
+          </a:xfrm>
+          <a:prstGeom prst="rect">
+            <a:avLst/>
+          </a:prstGeom>
+          <a:noFill/>
+          <a:ln/>
+        </p:spPr>
+        <p:txBody>
+          <a:bodyPr wrap="square" lIns="0" tIns="0" rIns="0" bIns="0" rtlCol="0" anchor="ctr"/>
+          <a:lstStyle/>
+          <a:p>
+            <a:pPr indent="0" marL="0">
+              <a:lnSpc>
+                <a:spcPts val="1600"/>
+              </a:lnSpc>
+              <a:buNone/>
+            </a:pPr>
+            <a:r>
+              <a:rPr lang="en-US" sz="1150" b="1" dirty="0">
+                <a:solidFill>
+                  <a:srgbClr val="1B1A17"/>
+                </a:solidFill>
+                <a:latin typeface="Georgia" pitchFamily="34" charset="0"/>
+                <a:ea typeface="Georgia" pitchFamily="34" charset="-122"/>
+                <a:cs typeface="Georgia" pitchFamily="34" charset="-120"/>
+              </a:rPr>
+              <a:t>We now beat the human annotation</a:t>
+            </a:r>
+            <a:pPr indent="0" marL="0">
+              <a:lnSpc>
+                <a:spcPts val="1600"/>
+              </a:lnSpc>
+              <a:buNone/>
+            </a:pPr>
+            <a:r>
+              <a:rPr lang="en-US" sz="1150" dirty="0">
+                <a:solidFill>
+                  <a:srgbClr val="1B1A17"/>
+                </a:solidFill>
+                <a:latin typeface="Georgia" pitchFamily="34" charset="0"/>
+                <a:ea typeface="Georgia" pitchFamily="34" charset="-122"/>
+                <a:cs typeface="Georgia" pitchFamily="34" charset="-120"/>
+              </a:rPr>
+              <a:t>  —  +39.5% against +26.8%, reversing the one comparison the compositing test lost. And collateral 22.2% is </a:t>
+            </a:r>
+            <a:pPr indent="0" marL="0">
+              <a:lnSpc>
+                <a:spcPts val="1600"/>
+              </a:lnSpc>
+              <a:buNone/>
+            </a:pPr>
+            <a:r>
+              <a:rPr lang="en-US" sz="1150" b="1" dirty="0">
+                <a:solidFill>
+                  <a:srgbClr val="1B1A17"/>
+                </a:solidFill>
+                <a:latin typeface="Georgia" pitchFamily="34" charset="0"/>
+                <a:ea typeface="Georgia" pitchFamily="34" charset="-122"/>
+                <a:cs typeface="Georgia" pitchFamily="34" charset="-120"/>
+              </a:rPr>
+              <a:t>below</a:t>
+            </a:r>
+            <a:pPr indent="0" marL="0">
+              <a:lnSpc>
+                <a:spcPts val="1600"/>
+              </a:lnSpc>
+              <a:buNone/>
+            </a:pPr>
+            <a:r>
+              <a:rPr lang="en-US" sz="1150" dirty="0">
+                <a:solidFill>
+                  <a:srgbClr val="1B1A17"/>
+                </a:solidFill>
+                <a:latin typeface="Georgia" pitchFamily="34" charset="0"/>
+                <a:ea typeface="Georgia" pitchFamily="34" charset="-122"/>
+                <a:cs typeface="Georgia" pitchFamily="34" charset="-120"/>
+              </a:rPr>
+              <a:t> whole-frame editing's 24.2%, so we win on both quantities rather than trading one for the other.</a:t>
+            </a:r>
+            <a:endParaRPr lang="en-US" sz="1150" dirty="0"/>
+          </a:p>
+        </p:txBody>
+      </p:sp>
+      <p:sp>
+        <p:nvSpPr>
+          <p:cNvPr id="9" name="Text 6"/>
+          <p:cNvSpPr/>
+          <p:nvPr/>
+        </p:nvSpPr>
+        <p:spPr>
+          <a:xfrm>
+            <a:off x="777240" y="4754880"/>
+            <a:ext cx="9144000" cy="201168"/>
+          </a:xfrm>
+          <a:prstGeom prst="rect">
+            <a:avLst/>
+          </a:prstGeom>
+          <a:noFill/>
+          <a:ln/>
+        </p:spPr>
+        <p:txBody>
+          <a:bodyPr wrap="square" lIns="0" tIns="0" rIns="0" bIns="0" rtlCol="0" anchor="ctr"/>
+          <a:lstStyle/>
+          <a:p>
+            <a:pPr indent="0" marL="0">
+              <a:buNone/>
+            </a:pPr>
+            <a:r>
+              <a:rPr lang="en-US" sz="1050" spc="30" kern="0" dirty="0">
+                <a:solidFill>
+                  <a:srgbClr val="6B6963"/>
+                </a:solidFill>
+                <a:latin typeface="Georgia" pitchFamily="34" charset="0"/>
+                <a:ea typeface="Georgia" pitchFamily="34" charset="-122"/>
+                <a:cs typeface="Georgia" pitchFamily="34" charset="-120"/>
+              </a:rPr>
+              <a:t>The operating point had to be found jointly</a:t>
+            </a:r>
+            <a:endParaRPr lang="en-US" sz="1050" dirty="0"/>
+          </a:p>
+        </p:txBody>
+      </p:sp>
+      <p:graphicFrame>
+        <p:nvGraphicFramePr>
+          <p:cNvPr id="23" name="Table 1"/>
+          <p:cNvGraphicFramePr>
+            <a:graphicFrameLocks noGrp="1"/>
+          </p:cNvGraphicFramePr>
+          <p:nvPr>
+            <p:extLst>
+              <p:ext uri="{D42A27DB-BD31-4B8C-83A1-F6EECF244321}">
+                <p14:modId xmlns:p14="http://schemas.microsoft.com/office/powerpoint/2010/main" val="1579011935"/>
+              </p:ext>
+            </p:extLst>
+          </p:nvPr>
+        </p:nvGraphicFramePr>
+        <p:xfrm>
+          <a:off x="777240" y="5010912"/>
+          <a:ext cx="10637215" cy="914400"/>
+        </p:xfrm>
+        <a:graphic>
+          <a:graphicData uri="http://schemas.openxmlformats.org/drawingml/2006/table">
+            <a:tbl>
+              <a:tblPr/>
+              <a:tblGrid>
+                <a:gridCol w="1490472"/>
+                <a:gridCol w="1828800"/>
+                <a:gridCol w="1828800"/>
+                <a:gridCol w="1828800"/>
+                <a:gridCol w="1828800"/>
+                <a:gridCol w="1828800"/>
+              </a:tblGrid>
+              <a:tr h="274320">
+                <a:tc>
+                  <a:txBody>
+                    <a:bodyPr/>
+                    <a:lstStyle/>
+                    <a:p>
+                      <a:pPr indent="0" marL="0">
+                        <a:buNone/>
+                      </a:pPr>
+                      <a:endParaRPr lang="en-US" sz="1000" dirty="0">
+                        <a:latin typeface="Georgia" charset="0"/>
+                        <a:ea typeface="Georgia" charset="0"/>
+                        <a:cs typeface="Georgia" charset="0"/>
+                      </a:endParaRPr>
+                    </a:p>
+                  </a:txBody>
+                  <a:tcPr marL="50800" marR="50800" marT="50800" marB="50800" anchor="t">
+                    <a:lnL w="0" cap="flat" cmpd="sng" algn="ctr">
+                      <a:noFill/>
+                    </a:lnL>
+                    <a:lnR w="0" cap="flat" cmpd="sng" algn="ctr">
+                      <a:noFill/>
+                    </a:lnR>
+                    <a:lnT w="13970" cap="flat" cmpd="sng" algn="ctr">
+                      <a:solidFill>
+                        <a:srgbClr val="1B1A17"/>
+                      </a:solidFill>
+                      <a:prstDash val="solid"/>
+                      <a:round/>
+                      <a:headEnd type="none" w="med" len="med"/>
+                      <a:tailEnd type="none" w="med" len="med"/>
+                    </a:lnT>
+                    <a:lnB w="7620" cap="flat" cmpd="sng" algn="ctr">
+                      <a:solidFill>
+                        <a:srgbClr val="1B1A17"/>
+                      </a:solidFill>
+                      <a:prstDash val="solid"/>
+                      <a:round/>
+                      <a:headEnd type="none" w="med" len="med"/>
+                      <a:tailEnd type="none" w="med" len="med"/>
+                    </a:lnB>
+                  </a:tcPr>
+                </a:tc>
+                <a:tc>
+                  <a:txBody>
+                    <a:bodyPr/>
+                    <a:lstStyle/>
+                    <a:p>
+                      <a:pPr algn="ctr" indent="0" marL="0">
+                        <a:buNone/>
+                      </a:pPr>
+                      <a:r>
+                        <a:rPr lang="en-US" sz="1000" b="1" dirty="0">
+                          <a:solidFill>
+                            <a:srgbClr val="1B1A17"/>
+                          </a:solidFill>
+                          <a:latin typeface="Georgia" pitchFamily="34" charset="0"/>
+                          <a:ea typeface="Georgia" pitchFamily="34" charset="-122"/>
+                          <a:cs typeface="Georgia" pitchFamily="34" charset="-120"/>
+                        </a:rPr>
+                        <a:t>0 px</a:t>
+                      </a:r>
+                      <a:endParaRPr lang="en-US" sz="1000" dirty="0">
+                        <a:latin typeface="Georgia" charset="0"/>
+                        <a:ea typeface="Georgia" charset="0"/>
+                        <a:cs typeface="Georgia" charset="0"/>
+                      </a:endParaRPr>
+                    </a:p>
+                  </a:txBody>
+                  <a:tcPr marL="50800" marR="50800" marT="50800" marB="50800" anchor="t">
+                    <a:lnL w="0" cap="flat" cmpd="sng" algn="ctr">
+                      <a:noFill/>
+                    </a:lnL>
+                    <a:lnR w="0" cap="flat" cmpd="sng" algn="ctr">
+                      <a:noFill/>
+                    </a:lnR>
+                    <a:lnT w="13970" cap="flat" cmpd="sng" algn="ctr">
+                      <a:solidFill>
+                        <a:srgbClr val="1B1A17"/>
+                      </a:solidFill>
+                      <a:prstDash val="solid"/>
+                      <a:round/>
+                      <a:headEnd type="none" w="med" len="med"/>
+                      <a:tailEnd type="none" w="med" len="med"/>
+                    </a:lnT>
+                    <a:lnB w="7620" cap="flat" cmpd="sng" algn="ctr">
+                      <a:solidFill>
+                        <a:srgbClr val="1B1A17"/>
+                      </a:solidFill>
+                      <a:prstDash val="solid"/>
+                      <a:round/>
+                      <a:headEnd type="none" w="med" len="med"/>
+                      <a:tailEnd type="none" w="med" len="med"/>
+                    </a:lnB>
+                  </a:tcPr>
+                </a:tc>
+                <a:tc>
+                  <a:txBody>
+                    <a:bodyPr/>
+                    <a:lstStyle/>
+                    <a:p>
+                      <a:pPr algn="ctr" indent="0" marL="0">
+                        <a:buNone/>
+                      </a:pPr>
+                      <a:r>
+                        <a:rPr lang="en-US" sz="1000" b="1" dirty="0">
+                          <a:solidFill>
+                            <a:srgbClr val="1B1A17"/>
+                          </a:solidFill>
+                          <a:latin typeface="Georgia" pitchFamily="34" charset="0"/>
+                          <a:ea typeface="Georgia" pitchFamily="34" charset="-122"/>
+                          <a:cs typeface="Georgia" pitchFamily="34" charset="-120"/>
+                        </a:rPr>
+                        <a:t>16 px</a:t>
+                      </a:r>
+                      <a:endParaRPr lang="en-US" sz="1000" dirty="0">
+                        <a:latin typeface="Georgia" charset="0"/>
+                        <a:ea typeface="Georgia" charset="0"/>
+                        <a:cs typeface="Georgia" charset="0"/>
+                      </a:endParaRPr>
+                    </a:p>
+                  </a:txBody>
+                  <a:tcPr marL="50800" marR="50800" marT="50800" marB="50800" anchor="t">
+                    <a:lnL w="0" cap="flat" cmpd="sng" algn="ctr">
+                      <a:noFill/>
+                    </a:lnL>
+                    <a:lnR w="0" cap="flat" cmpd="sng" algn="ctr">
+                      <a:noFill/>
+                    </a:lnR>
+                    <a:lnT w="13970" cap="flat" cmpd="sng" algn="ctr">
+                      <a:solidFill>
+                        <a:srgbClr val="1B1A17"/>
+                      </a:solidFill>
+                      <a:prstDash val="solid"/>
+                      <a:round/>
+                      <a:headEnd type="none" w="med" len="med"/>
+                      <a:tailEnd type="none" w="med" len="med"/>
+                    </a:lnT>
+                    <a:lnB w="7620" cap="flat" cmpd="sng" algn="ctr">
+                      <a:solidFill>
+                        <a:srgbClr val="1B1A17"/>
+                      </a:solidFill>
+                      <a:prstDash val="solid"/>
+                      <a:round/>
+                      <a:headEnd type="none" w="med" len="med"/>
+                      <a:tailEnd type="none" w="med" len="med"/>
+                    </a:lnB>
+                  </a:tcPr>
+                </a:tc>
+                <a:tc>
+                  <a:txBody>
+                    <a:bodyPr/>
+                    <a:lstStyle/>
+                    <a:p>
+                      <a:pPr algn="ctr" indent="0" marL="0">
+                        <a:buNone/>
+                      </a:pPr>
+                      <a:r>
+                        <a:rPr lang="en-US" sz="1000" b="1" dirty="0">
+                          <a:solidFill>
+                            <a:srgbClr val="1B1A17"/>
+                          </a:solidFill>
+                          <a:latin typeface="Georgia" pitchFamily="34" charset="0"/>
+                          <a:ea typeface="Georgia" pitchFamily="34" charset="-122"/>
+                          <a:cs typeface="Georgia" pitchFamily="34" charset="-120"/>
+                        </a:rPr>
+                        <a:t>32 px</a:t>
+                      </a:r>
+                      <a:endParaRPr lang="en-US" sz="1000" dirty="0">
+                        <a:latin typeface="Georgia" charset="0"/>
+                        <a:ea typeface="Georgia" charset="0"/>
+                        <a:cs typeface="Georgia" charset="0"/>
+                      </a:endParaRPr>
+                    </a:p>
+                  </a:txBody>
+                  <a:tcPr marL="50800" marR="50800" marT="50800" marB="50800" anchor="t">
+                    <a:lnL w="0" cap="flat" cmpd="sng" algn="ctr">
+                      <a:noFill/>
+                    </a:lnL>
+                    <a:lnR w="0" cap="flat" cmpd="sng" algn="ctr">
+                      <a:noFill/>
+                    </a:lnR>
+                    <a:lnT w="13970" cap="flat" cmpd="sng" algn="ctr">
+                      <a:solidFill>
+                        <a:srgbClr val="1B1A17"/>
+                      </a:solidFill>
+                      <a:prstDash val="solid"/>
+                      <a:round/>
+                      <a:headEnd type="none" w="med" len="med"/>
+                      <a:tailEnd type="none" w="med" len="med"/>
+                    </a:lnT>
+                    <a:lnB w="7620" cap="flat" cmpd="sng" algn="ctr">
+                      <a:solidFill>
+                        <a:srgbClr val="1B1A17"/>
+                      </a:solidFill>
+                      <a:prstDash val="solid"/>
+                      <a:round/>
+                      <a:headEnd type="none" w="med" len="med"/>
+                      <a:tailEnd type="none" w="med" len="med"/>
+                    </a:lnB>
+                  </a:tcPr>
+                </a:tc>
+                <a:tc>
+                  <a:txBody>
+                    <a:bodyPr/>
+                    <a:lstStyle/>
+                    <a:p>
+                      <a:pPr algn="ctr" indent="0" marL="0">
+                        <a:buNone/>
+                      </a:pPr>
+                      <a:r>
+                        <a:rPr lang="en-US" sz="1000" b="1" dirty="0">
+                          <a:solidFill>
+                            <a:srgbClr val="1B1A17"/>
+                          </a:solidFill>
+                          <a:latin typeface="Georgia" pitchFamily="34" charset="0"/>
+                          <a:ea typeface="Georgia" pitchFamily="34" charset="-122"/>
+                          <a:cs typeface="Georgia" pitchFamily="34" charset="-120"/>
+                        </a:rPr>
+                        <a:t>48 px</a:t>
+                      </a:r>
+                      <a:endParaRPr lang="en-US" sz="1000" dirty="0">
+                        <a:latin typeface="Georgia" charset="0"/>
+                        <a:ea typeface="Georgia" charset="0"/>
+                        <a:cs typeface="Georgia" charset="0"/>
+                      </a:endParaRPr>
+                    </a:p>
+                  </a:txBody>
+                  <a:tcPr marL="50800" marR="50800" marT="50800" marB="50800" anchor="t">
+                    <a:lnL w="0" cap="flat" cmpd="sng" algn="ctr">
+                      <a:noFill/>
+                    </a:lnL>
+                    <a:lnR w="0" cap="flat" cmpd="sng" algn="ctr">
+                      <a:noFill/>
+                    </a:lnR>
+                    <a:lnT w="13970" cap="flat" cmpd="sng" algn="ctr">
+                      <a:solidFill>
+                        <a:srgbClr val="1B1A17"/>
+                      </a:solidFill>
+                      <a:prstDash val="solid"/>
+                      <a:round/>
+                      <a:headEnd type="none" w="med" len="med"/>
+                      <a:tailEnd type="none" w="med" len="med"/>
+                    </a:lnT>
+                    <a:lnB w="7620" cap="flat" cmpd="sng" algn="ctr">
+                      <a:solidFill>
+                        <a:srgbClr val="1B1A17"/>
+                      </a:solidFill>
+                      <a:prstDash val="solid"/>
+                      <a:round/>
+                      <a:headEnd type="none" w="med" len="med"/>
+                      <a:tailEnd type="none" w="med" len="med"/>
+                    </a:lnB>
+                  </a:tcPr>
+                </a:tc>
+                <a:tc>
+                  <a:txBody>
+                    <a:bodyPr/>
+                    <a:lstStyle/>
+                    <a:p>
+                      <a:pPr algn="ctr" indent="0" marL="0">
+                        <a:buNone/>
+                      </a:pPr>
+                      <a:r>
+                        <a:rPr lang="en-US" sz="1000" b="1" dirty="0">
+                          <a:solidFill>
+                            <a:srgbClr val="1B1A17"/>
+                          </a:solidFill>
+                          <a:latin typeface="Georgia" pitchFamily="34" charset="0"/>
+                          <a:ea typeface="Georgia" pitchFamily="34" charset="-122"/>
+                          <a:cs typeface="Georgia" pitchFamily="34" charset="-120"/>
+                        </a:rPr>
+                        <a:t>64 px</a:t>
+                      </a:r>
+                      <a:endParaRPr lang="en-US" sz="1000" dirty="0">
+                        <a:latin typeface="Georgia" charset="0"/>
+                        <a:ea typeface="Georgia" charset="0"/>
+                        <a:cs typeface="Georgia" charset="0"/>
+                      </a:endParaRPr>
+                    </a:p>
+                  </a:txBody>
+                  <a:tcPr marL="50800" marR="50800" marT="50800" marB="50800" anchor="t">
+                    <a:lnL w="0" cap="flat" cmpd="sng" algn="ctr">
+                      <a:noFill/>
+                    </a:lnL>
+                    <a:lnR w="0" cap="flat" cmpd="sng" algn="ctr">
+                      <a:noFill/>
+                    </a:lnR>
+                    <a:lnT w="13970" cap="flat" cmpd="sng" algn="ctr">
+                      <a:solidFill>
+                        <a:srgbClr val="1B1A17"/>
+                      </a:solidFill>
+                      <a:prstDash val="solid"/>
+                      <a:round/>
+                      <a:headEnd type="none" w="med" len="med"/>
+                      <a:tailEnd type="none" w="med" len="med"/>
+                    </a:lnT>
+                    <a:lnB w="7620" cap="flat" cmpd="sng" algn="ctr">
+                      <a:solidFill>
+                        <a:srgbClr val="1B1A17"/>
+                      </a:solidFill>
+                      <a:prstDash val="solid"/>
+                      <a:round/>
+                      <a:headEnd type="none" w="med" len="med"/>
+                      <a:tailEnd type="none" w="med" len="med"/>
+                    </a:lnB>
+                  </a:tcPr>
+                </a:tc>
+              </a:tr>
+              <a:tr h="274320">
+                <a:tc>
+                  <a:txBody>
+                    <a:bodyPr/>
+                    <a:lstStyle/>
+                    <a:p>
+                      <a:pPr indent="0" marL="0">
+                        <a:buNone/>
+                      </a:pPr>
+                      <a:r>
+                        <a:rPr lang="en-US" sz="1000" dirty="0">
+                          <a:solidFill>
+                            <a:srgbClr val="1B1A17"/>
+                          </a:solidFill>
+                          <a:latin typeface="Georgia" pitchFamily="34" charset="0"/>
+                          <a:ea typeface="Georgia" pitchFamily="34" charset="-122"/>
+                          <a:cs typeface="Georgia" pitchFamily="34" charset="-120"/>
+                        </a:rPr>
+                        <a:t>thr 0.2</a:t>
+                      </a:r>
+                      <a:endParaRPr lang="en-US" sz="1000" dirty="0">
+                        <a:latin typeface="Georgia" charset="0"/>
+                        <a:ea typeface="Georgia" charset="0"/>
+                        <a:cs typeface="Georgia" charset="0"/>
+                      </a:endParaRPr>
+                    </a:p>
+                  </a:txBody>
+                  <a:tcPr marL="50800" marR="50800" marT="50800" marB="50800" anchor="t">
+                    <a:lnL w="0" cap="flat" cmpd="sng" algn="ctr">
+                      <a:noFill/>
+                    </a:lnL>
+                    <a:lnR w="0" cap="flat" cmpd="sng" algn="ctr">
+                      <a:noFill/>
+                    </a:lnR>
+                    <a:lnT w="0" cap="flat" cmpd="sng" algn="ctr">
+                      <a:noFill/>
+                    </a:lnT>
+                    <a:lnB w="0" cap="flat" cmpd="sng" algn="ctr">
+                      <a:solidFill>
+                        <a:srgbClr val="FFFFFF"/>
+                      </a:solidFill>
+                      <a:prstDash val="solid"/>
+                      <a:round/>
+                      <a:headEnd type="none" w="med" len="med"/>
+                      <a:tailEnd type="none" w="med" len="med"/>
+                    </a:lnB>
+                  </a:tcPr>
+                </a:tc>
+                <a:tc>
+                  <a:txBody>
+                    <a:bodyPr/>
+                    <a:lstStyle/>
+                    <a:p>
+                      <a:pPr algn="ctr" indent="0" marL="0">
+                        <a:buNone/>
+                      </a:pPr>
+                      <a:r>
+                        <a:rPr lang="en-US" sz="1000" dirty="0">
+                          <a:solidFill>
+                            <a:srgbClr val="1B1A17"/>
+                          </a:solidFill>
+                          <a:latin typeface="Georgia" pitchFamily="34" charset="0"/>
+                          <a:ea typeface="Georgia" pitchFamily="34" charset="-122"/>
+                          <a:cs typeface="Georgia" pitchFamily="34" charset="-120"/>
+                        </a:rPr>
+                        <a:t>+31.2</a:t>
+                      </a:r>
+                      <a:endParaRPr lang="en-US" sz="1000" dirty="0">
+                        <a:latin typeface="Georgia" charset="0"/>
+                        <a:ea typeface="Georgia" charset="0"/>
+                        <a:cs typeface="Georgia" charset="0"/>
+                      </a:endParaRPr>
+                    </a:p>
+                  </a:txBody>
+                  <a:tcPr marL="50800" marR="50800" marT="50800" marB="50800" anchor="t">
+                    <a:lnL w="0" cap="flat" cmpd="sng" algn="ctr">
+                      <a:noFill/>
+                    </a:lnL>
+                    <a:lnR w="0" cap="flat" cmpd="sng" algn="ctr">
+                      <a:noFill/>
+                    </a:lnR>
+                    <a:lnT w="0" cap="flat" cmpd="sng" algn="ctr">
+                      <a:noFill/>
+                    </a:lnT>
+                    <a:lnB w="0" cap="flat" cmpd="sng" algn="ctr">
+                      <a:solidFill>
+                        <a:srgbClr val="FFFFFF"/>
+                      </a:solidFill>
+                      <a:prstDash val="solid"/>
+                      <a:round/>
+                      <a:headEnd type="none" w="med" len="med"/>
+                      <a:tailEnd type="none" w="med" len="med"/>
+                    </a:lnB>
+                  </a:tcPr>
+                </a:tc>
+                <a:tc>
+                  <a:txBody>
+                    <a:bodyPr/>
+                    <a:lstStyle/>
+                    <a:p>
+                      <a:pPr algn="ctr" indent="0" marL="0">
+                        <a:buNone/>
+                      </a:pPr>
+                      <a:r>
+                        <a:rPr lang="en-US" sz="1000" dirty="0">
+                          <a:solidFill>
+                            <a:srgbClr val="1B1A17"/>
+                          </a:solidFill>
+                          <a:latin typeface="Georgia" pitchFamily="34" charset="0"/>
+                          <a:ea typeface="Georgia" pitchFamily="34" charset="-122"/>
+                          <a:cs typeface="Georgia" pitchFamily="34" charset="-120"/>
+                        </a:rPr>
+                        <a:t>+36.9</a:t>
+                      </a:r>
+                      <a:endParaRPr lang="en-US" sz="1000" dirty="0">
+                        <a:latin typeface="Georgia" charset="0"/>
+                        <a:ea typeface="Georgia" charset="0"/>
+                        <a:cs typeface="Georgia" charset="0"/>
+                      </a:endParaRPr>
+                    </a:p>
+                  </a:txBody>
+                  <a:tcPr marL="50800" marR="50800" marT="50800" marB="50800" anchor="t">
+                    <a:lnL w="0" cap="flat" cmpd="sng" algn="ctr">
+                      <a:noFill/>
+                    </a:lnL>
+                    <a:lnR w="0" cap="flat" cmpd="sng" algn="ctr">
+                      <a:noFill/>
+                    </a:lnR>
+                    <a:lnT w="0" cap="flat" cmpd="sng" algn="ctr">
+                      <a:noFill/>
+                    </a:lnT>
+                    <a:lnB w="0" cap="flat" cmpd="sng" algn="ctr">
+                      <a:solidFill>
+                        <a:srgbClr val="FFFFFF"/>
+                      </a:solidFill>
+                      <a:prstDash val="solid"/>
+                      <a:round/>
+                      <a:headEnd type="none" w="med" len="med"/>
+                      <a:tailEnd type="none" w="med" len="med"/>
+                    </a:lnB>
+                  </a:tcPr>
+                </a:tc>
+                <a:tc>
+                  <a:txBody>
+                    <a:bodyPr/>
+                    <a:lstStyle/>
+                    <a:p>
+                      <a:pPr algn="ctr" indent="0" marL="0">
+                        <a:buNone/>
+                      </a:pPr>
+                      <a:r>
+                        <a:rPr lang="en-US" sz="1000" dirty="0">
+                          <a:solidFill>
+                            <a:srgbClr val="1B1A17"/>
+                          </a:solidFill>
+                          <a:latin typeface="Georgia" pitchFamily="34" charset="0"/>
+                          <a:ea typeface="Georgia" pitchFamily="34" charset="-122"/>
+                          <a:cs typeface="Georgia" pitchFamily="34" charset="-120"/>
+                        </a:rPr>
+                        <a:t>+36.7</a:t>
+                      </a:r>
+                      <a:endParaRPr lang="en-US" sz="1000" dirty="0">
+                        <a:latin typeface="Georgia" charset="0"/>
+                        <a:ea typeface="Georgia" charset="0"/>
+                        <a:cs typeface="Georgia" charset="0"/>
+                      </a:endParaRPr>
+                    </a:p>
+                  </a:txBody>
+                  <a:tcPr marL="50800" marR="50800" marT="50800" marB="50800" anchor="t">
+                    <a:lnL w="0" cap="flat" cmpd="sng" algn="ctr">
+                      <a:noFill/>
+                    </a:lnL>
+                    <a:lnR w="0" cap="flat" cmpd="sng" algn="ctr">
+                      <a:noFill/>
+                    </a:lnR>
+                    <a:lnT w="0" cap="flat" cmpd="sng" algn="ctr">
+                      <a:noFill/>
+                    </a:lnT>
+                    <a:lnB w="0" cap="flat" cmpd="sng" algn="ctr">
+                      <a:solidFill>
+                        <a:srgbClr val="FFFFFF"/>
+                      </a:solidFill>
+                      <a:prstDash val="solid"/>
+                      <a:round/>
+                      <a:headEnd type="none" w="med" len="med"/>
+                      <a:tailEnd type="none" w="med" len="med"/>
+                    </a:lnB>
+                  </a:tcPr>
+                </a:tc>
+                <a:tc>
+                  <a:txBody>
+                    <a:bodyPr/>
+                    <a:lstStyle/>
+                    <a:p>
+                      <a:pPr algn="ctr" indent="0" marL="0">
+                        <a:buNone/>
+                      </a:pPr>
+                      <a:r>
+                        <a:rPr lang="en-US" sz="1000" dirty="0">
+                          <a:solidFill>
+                            <a:srgbClr val="1B1A17"/>
+                          </a:solidFill>
+                          <a:latin typeface="Georgia" pitchFamily="34" charset="0"/>
+                          <a:ea typeface="Georgia" pitchFamily="34" charset="-122"/>
+                          <a:cs typeface="Georgia" pitchFamily="34" charset="-120"/>
+                        </a:rPr>
+                        <a:t>+35.7</a:t>
+                      </a:r>
+                      <a:endParaRPr lang="en-US" sz="1000" dirty="0">
+                        <a:latin typeface="Georgia" charset="0"/>
+                        <a:ea typeface="Georgia" charset="0"/>
+                        <a:cs typeface="Georgia" charset="0"/>
+                      </a:endParaRPr>
+                    </a:p>
+                  </a:txBody>
+                  <a:tcPr marL="50800" marR="50800" marT="50800" marB="50800" anchor="t">
+                    <a:lnL w="0" cap="flat" cmpd="sng" algn="ctr">
+                      <a:noFill/>
+                    </a:lnL>
+                    <a:lnR w="0" cap="flat" cmpd="sng" algn="ctr">
+                      <a:noFill/>
+                    </a:lnR>
+                    <a:lnT w="0" cap="flat" cmpd="sng" algn="ctr">
+                      <a:noFill/>
+                    </a:lnT>
+                    <a:lnB w="0" cap="flat" cmpd="sng" algn="ctr">
+                      <a:solidFill>
+                        <a:srgbClr val="FFFFFF"/>
+                      </a:solidFill>
+                      <a:prstDash val="solid"/>
+                      <a:round/>
+                      <a:headEnd type="none" w="med" len="med"/>
+                      <a:tailEnd type="none" w="med" len="med"/>
+                    </a:lnB>
+                  </a:tcPr>
+                </a:tc>
+                <a:tc>
+                  <a:txBody>
+                    <a:bodyPr/>
+                    <a:lstStyle/>
+                    <a:p>
+                      <a:pPr algn="ctr" indent="0" marL="0">
+                        <a:buNone/>
+                      </a:pPr>
+                      <a:r>
+                        <a:rPr lang="en-US" sz="1000" dirty="0">
+                          <a:solidFill>
+                            <a:srgbClr val="1B1A17"/>
+                          </a:solidFill>
+                          <a:latin typeface="Georgia" pitchFamily="34" charset="0"/>
+                          <a:ea typeface="Georgia" pitchFamily="34" charset="-122"/>
+                          <a:cs typeface="Georgia" pitchFamily="34" charset="-120"/>
+                        </a:rPr>
+                        <a:t>+32.7</a:t>
+                      </a:r>
+                      <a:endParaRPr lang="en-US" sz="1000" dirty="0">
+                        <a:latin typeface="Georgia" charset="0"/>
+                        <a:ea typeface="Georgia" charset="0"/>
+                        <a:cs typeface="Georgia" charset="0"/>
+                      </a:endParaRPr>
+                    </a:p>
+                  </a:txBody>
+                  <a:tcPr marL="50800" marR="50800" marT="50800" marB="50800" anchor="t">
+                    <a:lnL w="0" cap="flat" cmpd="sng" algn="ctr">
+                      <a:noFill/>
+                    </a:lnL>
+                    <a:lnR w="0" cap="flat" cmpd="sng" algn="ctr">
+                      <a:noFill/>
+                    </a:lnR>
+                    <a:lnT w="0" cap="flat" cmpd="sng" algn="ctr">
+                      <a:noFill/>
+                    </a:lnT>
+                    <a:lnB w="0" cap="flat" cmpd="sng" algn="ctr">
+                      <a:solidFill>
+                        <a:srgbClr val="FFFFFF"/>
+                      </a:solidFill>
+                      <a:prstDash val="solid"/>
+                      <a:round/>
+                      <a:headEnd type="none" w="med" len="med"/>
+                      <a:tailEnd type="none" w="med" len="med"/>
+                    </a:lnB>
+                  </a:tcPr>
+                </a:tc>
+              </a:tr>
+              <a:tr h="274320">
+                <a:tc>
+                  <a:txBody>
+                    <a:bodyPr/>
+                    <a:lstStyle/>
+                    <a:p>
+                      <a:pPr indent="0" marL="0">
+                        <a:buNone/>
+                      </a:pPr>
+                      <a:r>
+                        <a:rPr lang="en-US" sz="1000" b="1" dirty="0">
+                          <a:solidFill>
+                            <a:srgbClr val="1B1A17"/>
+                          </a:solidFill>
+                          <a:latin typeface="Georgia" pitchFamily="34" charset="0"/>
+                          <a:ea typeface="Georgia" pitchFamily="34" charset="-122"/>
+                          <a:cs typeface="Georgia" pitchFamily="34" charset="-120"/>
+                        </a:rPr>
+                        <a:t>thr 0.3</a:t>
+                      </a:r>
+                      <a:endParaRPr lang="en-US" sz="1000" dirty="0">
+                        <a:latin typeface="Georgia" charset="0"/>
+                        <a:ea typeface="Georgia" charset="0"/>
+                        <a:cs typeface="Georgia" charset="0"/>
+                      </a:endParaRPr>
+                    </a:p>
+                  </a:txBody>
+                  <a:tcPr marL="50800" marR="50800" marT="50800" marB="50800" anchor="t">
+                    <a:lnL w="0" cap="flat" cmpd="sng" algn="ctr">
+                      <a:noFill/>
+                    </a:lnL>
+                    <a:lnR w="0" cap="flat" cmpd="sng" algn="ctr">
+                      <a:noFill/>
+                    </a:lnR>
+                    <a:lnT w="0" cap="flat" cmpd="sng" algn="ctr">
+                      <a:noFill/>
+                    </a:lnT>
+                    <a:lnB w="0" cap="flat" cmpd="sng" algn="ctr">
+                      <a:solidFill>
+                        <a:srgbClr val="FFFFFF"/>
+                      </a:solidFill>
+                      <a:prstDash val="solid"/>
+                      <a:round/>
+                      <a:headEnd type="none" w="med" len="med"/>
+                      <a:tailEnd type="none" w="med" len="med"/>
+                    </a:lnB>
+                  </a:tcPr>
+                </a:tc>
+                <a:tc>
+                  <a:txBody>
+                    <a:bodyPr/>
+                    <a:lstStyle/>
+                    <a:p>
+                      <a:pPr algn="ctr" indent="0" marL="0">
+                        <a:buNone/>
+                      </a:pPr>
+                      <a:r>
+                        <a:rPr lang="en-US" sz="1000" b="1" dirty="0">
+                          <a:solidFill>
+                            <a:srgbClr val="1B1A17"/>
+                          </a:solidFill>
+                          <a:latin typeface="Georgia" pitchFamily="34" charset="0"/>
+                          <a:ea typeface="Georgia" pitchFamily="34" charset="-122"/>
+                          <a:cs typeface="Georgia" pitchFamily="34" charset="-120"/>
+                        </a:rPr>
+                        <a:t>+28.6</a:t>
+                      </a:r>
+                      <a:endParaRPr lang="en-US" sz="1000" dirty="0">
+                        <a:latin typeface="Georgia" charset="0"/>
+                        <a:ea typeface="Georgia" charset="0"/>
+                        <a:cs typeface="Georgia" charset="0"/>
+                      </a:endParaRPr>
+                    </a:p>
+                  </a:txBody>
+                  <a:tcPr marL="50800" marR="50800" marT="50800" marB="50800" anchor="t">
+                    <a:lnL w="0" cap="flat" cmpd="sng" algn="ctr">
+                      <a:noFill/>
+                    </a:lnL>
+                    <a:lnR w="0" cap="flat" cmpd="sng" algn="ctr">
+                      <a:noFill/>
+                    </a:lnR>
+                    <a:lnT w="0" cap="flat" cmpd="sng" algn="ctr">
+                      <a:noFill/>
+                    </a:lnT>
+                    <a:lnB w="0" cap="flat" cmpd="sng" algn="ctr">
+                      <a:solidFill>
+                        <a:srgbClr val="FFFFFF"/>
+                      </a:solidFill>
+                      <a:prstDash val="solid"/>
+                      <a:round/>
+                      <a:headEnd type="none" w="med" len="med"/>
+                      <a:tailEnd type="none" w="med" len="med"/>
+                    </a:lnB>
+                  </a:tcPr>
+                </a:tc>
+                <a:tc>
+                  <a:txBody>
+                    <a:bodyPr/>
+                    <a:lstStyle/>
+                    <a:p>
+                      <a:pPr algn="ctr" indent="0" marL="0">
+                        <a:buNone/>
+                      </a:pPr>
+                      <a:r>
+                        <a:rPr lang="en-US" sz="1000" b="1" dirty="0">
+                          <a:solidFill>
+                            <a:srgbClr val="1B1A17"/>
+                          </a:solidFill>
+                          <a:latin typeface="Georgia" pitchFamily="34" charset="0"/>
+                          <a:ea typeface="Georgia" pitchFamily="34" charset="-122"/>
+                          <a:cs typeface="Georgia" pitchFamily="34" charset="-120"/>
+                        </a:rPr>
+                        <a:t>+36.5</a:t>
+                      </a:r>
+                      <a:endParaRPr lang="en-US" sz="1000" dirty="0">
+                        <a:latin typeface="Georgia" charset="0"/>
+                        <a:ea typeface="Georgia" charset="0"/>
+                        <a:cs typeface="Georgia" charset="0"/>
+                      </a:endParaRPr>
+                    </a:p>
+                  </a:txBody>
+                  <a:tcPr marL="50800" marR="50800" marT="50800" marB="50800" anchor="t">
+                    <a:lnL w="0" cap="flat" cmpd="sng" algn="ctr">
+                      <a:noFill/>
+                    </a:lnL>
+                    <a:lnR w="0" cap="flat" cmpd="sng" algn="ctr">
+                      <a:noFill/>
+                    </a:lnR>
+                    <a:lnT w="0" cap="flat" cmpd="sng" algn="ctr">
+                      <a:noFill/>
+                    </a:lnT>
+                    <a:lnB w="0" cap="flat" cmpd="sng" algn="ctr">
+                      <a:solidFill>
+                        <a:srgbClr val="FFFFFF"/>
+                      </a:solidFill>
+                      <a:prstDash val="solid"/>
+                      <a:round/>
+                      <a:headEnd type="none" w="med" len="med"/>
+                      <a:tailEnd type="none" w="med" len="med"/>
+                    </a:lnB>
+                  </a:tcPr>
+                </a:tc>
+                <a:tc>
+                  <a:txBody>
+                    <a:bodyPr/>
+                    <a:lstStyle/>
+                    <a:p>
+                      <a:pPr algn="ctr" indent="0" marL="0">
+                        <a:buNone/>
+                      </a:pPr>
+                      <a:r>
+                        <a:rPr lang="en-US" sz="1000" b="1" dirty="0">
+                          <a:solidFill>
+                            <a:srgbClr val="1B1A17"/>
+                          </a:solidFill>
+                          <a:latin typeface="Georgia" pitchFamily="34" charset="0"/>
+                          <a:ea typeface="Georgia" pitchFamily="34" charset="-122"/>
+                          <a:cs typeface="Georgia" pitchFamily="34" charset="-120"/>
+                        </a:rPr>
+                        <a:t>+39.5</a:t>
+                      </a:r>
+                      <a:endParaRPr lang="en-US" sz="1000" dirty="0">
+                        <a:latin typeface="Georgia" charset="0"/>
+                        <a:ea typeface="Georgia" charset="0"/>
+                        <a:cs typeface="Georgia" charset="0"/>
+                      </a:endParaRPr>
+                    </a:p>
+                  </a:txBody>
+                  <a:tcPr marL="50800" marR="50800" marT="50800" marB="50800" anchor="t">
+                    <a:lnL w="0" cap="flat" cmpd="sng" algn="ctr">
+                      <a:noFill/>
+                    </a:lnL>
+                    <a:lnR w="0" cap="flat" cmpd="sng" algn="ctr">
+                      <a:noFill/>
+                    </a:lnR>
+                    <a:lnT w="0" cap="flat" cmpd="sng" algn="ctr">
+                      <a:noFill/>
+                    </a:lnT>
+                    <a:lnB w="0" cap="flat" cmpd="sng" algn="ctr">
+                      <a:solidFill>
+                        <a:srgbClr val="FFFFFF"/>
+                      </a:solidFill>
+                      <a:prstDash val="solid"/>
+                      <a:round/>
+                      <a:headEnd type="none" w="med" len="med"/>
+                      <a:tailEnd type="none" w="med" len="med"/>
+                    </a:lnB>
+                  </a:tcPr>
+                </a:tc>
+                <a:tc>
+                  <a:txBody>
+                    <a:bodyPr/>
+                    <a:lstStyle/>
+                    <a:p>
+                      <a:pPr algn="ctr" indent="0" marL="0">
+                        <a:buNone/>
+                      </a:pPr>
+                      <a:r>
+                        <a:rPr lang="en-US" sz="1000" b="1" dirty="0">
+                          <a:solidFill>
+                            <a:srgbClr val="1B1A17"/>
+                          </a:solidFill>
+                          <a:latin typeface="Georgia" pitchFamily="34" charset="0"/>
+                          <a:ea typeface="Georgia" pitchFamily="34" charset="-122"/>
+                          <a:cs typeface="Georgia" pitchFamily="34" charset="-120"/>
+                        </a:rPr>
+                        <a:t>+37.9</a:t>
+                      </a:r>
+                      <a:endParaRPr lang="en-US" sz="1000" dirty="0">
+                        <a:latin typeface="Georgia" charset="0"/>
+                        <a:ea typeface="Georgia" charset="0"/>
+                        <a:cs typeface="Georgia" charset="0"/>
+                      </a:endParaRPr>
+                    </a:p>
+                  </a:txBody>
+                  <a:tcPr marL="50800" marR="50800" marT="50800" marB="50800" anchor="t">
+                    <a:lnL w="0" cap="flat" cmpd="sng" algn="ctr">
+                      <a:noFill/>
+                    </a:lnL>
+                    <a:lnR w="0" cap="flat" cmpd="sng" algn="ctr">
+                      <a:noFill/>
+                    </a:lnR>
+                    <a:lnT w="0" cap="flat" cmpd="sng" algn="ctr">
+                      <a:noFill/>
+                    </a:lnT>
+                    <a:lnB w="0" cap="flat" cmpd="sng" algn="ctr">
+                      <a:solidFill>
+                        <a:srgbClr val="FFFFFF"/>
+                      </a:solidFill>
+                      <a:prstDash val="solid"/>
+                      <a:round/>
+                      <a:headEnd type="none" w="med" len="med"/>
+                      <a:tailEnd type="none" w="med" len="med"/>
+                    </a:lnB>
+                  </a:tcPr>
+                </a:tc>
+                <a:tc>
+                  <a:txBody>
+                    <a:bodyPr/>
+                    <a:lstStyle/>
+                    <a:p>
+                      <a:pPr algn="ctr" indent="0" marL="0">
+                        <a:buNone/>
+                      </a:pPr>
+                      <a:r>
+                        <a:rPr lang="en-US" sz="1000" b="1" dirty="0">
+                          <a:solidFill>
+                            <a:srgbClr val="1B1A17"/>
+                          </a:solidFill>
+                          <a:latin typeface="Georgia" pitchFamily="34" charset="0"/>
+                          <a:ea typeface="Georgia" pitchFamily="34" charset="-122"/>
+                          <a:cs typeface="Georgia" pitchFamily="34" charset="-120"/>
+                        </a:rPr>
+                        <a:t>+33.3</a:t>
+                      </a:r>
+                      <a:endParaRPr lang="en-US" sz="1000" dirty="0">
+                        <a:latin typeface="Georgia" charset="0"/>
+                        <a:ea typeface="Georgia" charset="0"/>
+                        <a:cs typeface="Georgia" charset="0"/>
+                      </a:endParaRPr>
+                    </a:p>
+                  </a:txBody>
+                  <a:tcPr marL="50800" marR="50800" marT="50800" marB="50800" anchor="t">
+                    <a:lnL w="0" cap="flat" cmpd="sng" algn="ctr">
+                      <a:noFill/>
+                    </a:lnL>
+                    <a:lnR w="0" cap="flat" cmpd="sng" algn="ctr">
+                      <a:noFill/>
+                    </a:lnR>
+                    <a:lnT w="0" cap="flat" cmpd="sng" algn="ctr">
+                      <a:noFill/>
+                    </a:lnT>
+                    <a:lnB w="0" cap="flat" cmpd="sng" algn="ctr">
+                      <a:solidFill>
+                        <a:srgbClr val="FFFFFF"/>
+                      </a:solidFill>
+                      <a:prstDash val="solid"/>
+                      <a:round/>
+                      <a:headEnd type="none" w="med" len="med"/>
+                      <a:tailEnd type="none" w="med" len="med"/>
+                    </a:lnB>
+                  </a:tcPr>
+                </a:tc>
+              </a:tr>
+              <a:tr h="274320">
+                <a:tc>
+                  <a:txBody>
+                    <a:bodyPr/>
+                    <a:lstStyle/>
+                    <a:p>
+                      <a:pPr indent="0" marL="0">
+                        <a:buNone/>
+                      </a:pPr>
+                      <a:r>
+                        <a:rPr lang="en-US" sz="1000" dirty="0">
+                          <a:solidFill>
+                            <a:srgbClr val="1B1A17"/>
+                          </a:solidFill>
+                          <a:latin typeface="Georgia" pitchFamily="34" charset="0"/>
+                          <a:ea typeface="Georgia" pitchFamily="34" charset="-122"/>
+                          <a:cs typeface="Georgia" pitchFamily="34" charset="-120"/>
+                        </a:rPr>
+                        <a:t>thr 0.4</a:t>
+                      </a:r>
+                      <a:endParaRPr lang="en-US" sz="1000" dirty="0">
+                        <a:latin typeface="Georgia" charset="0"/>
+                        <a:ea typeface="Georgia" charset="0"/>
+                        <a:cs typeface="Georgia" charset="0"/>
+                      </a:endParaRPr>
+                    </a:p>
+                  </a:txBody>
+                  <a:tcPr marL="50800" marR="50800" marT="50800" marB="50800" anchor="t">
+                    <a:lnL w="0" cap="flat" cmpd="sng" algn="ctr">
+                      <a:noFill/>
+                    </a:lnL>
+                    <a:lnR w="0" cap="flat" cmpd="sng" algn="ctr">
+                      <a:noFill/>
+                    </a:lnR>
+                    <a:lnT w="0" cap="flat" cmpd="sng" algn="ctr">
+                      <a:noFill/>
+                    </a:lnT>
+                    <a:lnB w="0" cap="flat" cmpd="sng" algn="ctr">
+                      <a:solidFill>
+                        <a:srgbClr val="FFFFFF"/>
+                      </a:solidFill>
+                      <a:prstDash val="solid"/>
+                      <a:round/>
+                      <a:headEnd type="none" w="med" len="med"/>
+                      <a:tailEnd type="none" w="med" len="med"/>
+                    </a:lnB>
+                  </a:tcPr>
+                </a:tc>
+                <a:tc>
+                  <a:txBody>
+                    <a:bodyPr/>
+                    <a:lstStyle/>
+                    <a:p>
+                      <a:pPr algn="ctr" indent="0" marL="0">
+                        <a:buNone/>
+                      </a:pPr>
+                      <a:r>
+                        <a:rPr lang="en-US" sz="1000" dirty="0">
+                          <a:solidFill>
+                            <a:srgbClr val="1B1A17"/>
+                          </a:solidFill>
+                          <a:latin typeface="Georgia" pitchFamily="34" charset="0"/>
+                          <a:ea typeface="Georgia" pitchFamily="34" charset="-122"/>
+                          <a:cs typeface="Georgia" pitchFamily="34" charset="-120"/>
+                        </a:rPr>
+                        <a:t>+26.5</a:t>
+                      </a:r>
+                      <a:endParaRPr lang="en-US" sz="1000" dirty="0">
+                        <a:latin typeface="Georgia" charset="0"/>
+                        <a:ea typeface="Georgia" charset="0"/>
+                        <a:cs typeface="Georgia" charset="0"/>
+                      </a:endParaRPr>
+                    </a:p>
+                  </a:txBody>
+                  <a:tcPr marL="50800" marR="50800" marT="50800" marB="50800" anchor="t">
+                    <a:lnL w="0" cap="flat" cmpd="sng" algn="ctr">
+                      <a:noFill/>
+                    </a:lnL>
+                    <a:lnR w="0" cap="flat" cmpd="sng" algn="ctr">
+                      <a:noFill/>
+                    </a:lnR>
+                    <a:lnT w="0" cap="flat" cmpd="sng" algn="ctr">
+                      <a:noFill/>
+                    </a:lnT>
+                    <a:lnB w="0" cap="flat" cmpd="sng" algn="ctr">
+                      <a:solidFill>
+                        <a:srgbClr val="FFFFFF"/>
+                      </a:solidFill>
+                      <a:prstDash val="solid"/>
+                      <a:round/>
+                      <a:headEnd type="none" w="med" len="med"/>
+                      <a:tailEnd type="none" w="med" len="med"/>
+                    </a:lnB>
+                  </a:tcPr>
+                </a:tc>
+                <a:tc>
+                  <a:txBody>
+                    <a:bodyPr/>
+                    <a:lstStyle/>
+                    <a:p>
+                      <a:pPr algn="ctr" indent="0" marL="0">
+                        <a:buNone/>
+                      </a:pPr>
+                      <a:r>
+                        <a:rPr lang="en-US" sz="1000" dirty="0">
+                          <a:solidFill>
+                            <a:srgbClr val="1B1A17"/>
+                          </a:solidFill>
+                          <a:latin typeface="Georgia" pitchFamily="34" charset="0"/>
+                          <a:ea typeface="Georgia" pitchFamily="34" charset="-122"/>
+                          <a:cs typeface="Georgia" pitchFamily="34" charset="-120"/>
+                        </a:rPr>
+                        <a:t>+34.9</a:t>
+                      </a:r>
+                      <a:endParaRPr lang="en-US" sz="1000" dirty="0">
+                        <a:latin typeface="Georgia" charset="0"/>
+                        <a:ea typeface="Georgia" charset="0"/>
+                        <a:cs typeface="Georgia" charset="0"/>
+                      </a:endParaRPr>
+                    </a:p>
+                  </a:txBody>
+                  <a:tcPr marL="50800" marR="50800" marT="50800" marB="50800" anchor="t">
+                    <a:lnL w="0" cap="flat" cmpd="sng" algn="ctr">
+                      <a:noFill/>
+                    </a:lnL>
+                    <a:lnR w="0" cap="flat" cmpd="sng" algn="ctr">
+                      <a:noFill/>
+                    </a:lnR>
+                    <a:lnT w="0" cap="flat" cmpd="sng" algn="ctr">
+                      <a:noFill/>
+                    </a:lnT>
+                    <a:lnB w="0" cap="flat" cmpd="sng" algn="ctr">
+                      <a:solidFill>
+                        <a:srgbClr val="FFFFFF"/>
+                      </a:solidFill>
+                      <a:prstDash val="solid"/>
+                      <a:round/>
+                      <a:headEnd type="none" w="med" len="med"/>
+                      <a:tailEnd type="none" w="med" len="med"/>
+                    </a:lnB>
+                  </a:tcPr>
+                </a:tc>
+                <a:tc>
+                  <a:txBody>
+                    <a:bodyPr/>
+                    <a:lstStyle/>
+                    <a:p>
+                      <a:pPr algn="ctr" indent="0" marL="0">
+                        <a:buNone/>
+                      </a:pPr>
+                      <a:r>
+                        <a:rPr lang="en-US" sz="1000" dirty="0">
+                          <a:solidFill>
+                            <a:srgbClr val="1B1A17"/>
+                          </a:solidFill>
+                          <a:latin typeface="Georgia" pitchFamily="34" charset="0"/>
+                          <a:ea typeface="Georgia" pitchFamily="34" charset="-122"/>
+                          <a:cs typeface="Georgia" pitchFamily="34" charset="-120"/>
+                        </a:rPr>
+                        <a:t>+38.4</a:t>
+                      </a:r>
+                      <a:endParaRPr lang="en-US" sz="1000" dirty="0">
+                        <a:latin typeface="Georgia" charset="0"/>
+                        <a:ea typeface="Georgia" charset="0"/>
+                        <a:cs typeface="Georgia" charset="0"/>
+                      </a:endParaRPr>
+                    </a:p>
+                  </a:txBody>
+                  <a:tcPr marL="50800" marR="50800" marT="50800" marB="50800" anchor="t">
+                    <a:lnL w="0" cap="flat" cmpd="sng" algn="ctr">
+                      <a:noFill/>
+                    </a:lnL>
+                    <a:lnR w="0" cap="flat" cmpd="sng" algn="ctr">
+                      <a:noFill/>
+                    </a:lnR>
+                    <a:lnT w="0" cap="flat" cmpd="sng" algn="ctr">
+                      <a:noFill/>
+                    </a:lnT>
+                    <a:lnB w="0" cap="flat" cmpd="sng" algn="ctr">
+                      <a:solidFill>
+                        <a:srgbClr val="FFFFFF"/>
+                      </a:solidFill>
+                      <a:prstDash val="solid"/>
+                      <a:round/>
+                      <a:headEnd type="none" w="med" len="med"/>
+                      <a:tailEnd type="none" w="med" len="med"/>
+                    </a:lnB>
+                  </a:tcPr>
+                </a:tc>
+                <a:tc>
+                  <a:txBody>
+                    <a:bodyPr/>
+                    <a:lstStyle/>
+                    <a:p>
+                      <a:pPr algn="ctr" indent="0" marL="0">
+                        <a:buNone/>
+                      </a:pPr>
+                      <a:r>
+                        <a:rPr lang="en-US" sz="1000" dirty="0">
+                          <a:solidFill>
+                            <a:srgbClr val="1B1A17"/>
+                          </a:solidFill>
+                          <a:latin typeface="Georgia" pitchFamily="34" charset="0"/>
+                          <a:ea typeface="Georgia" pitchFamily="34" charset="-122"/>
+                          <a:cs typeface="Georgia" pitchFamily="34" charset="-120"/>
+                        </a:rPr>
+                        <a:t>+39.4</a:t>
+                      </a:r>
+                      <a:endParaRPr lang="en-US" sz="1000" dirty="0">
+                        <a:latin typeface="Georgia" charset="0"/>
+                        <a:ea typeface="Georgia" charset="0"/>
+                        <a:cs typeface="Georgia" charset="0"/>
+                      </a:endParaRPr>
+                    </a:p>
+                  </a:txBody>
+                  <a:tcPr marL="50800" marR="50800" marT="50800" marB="50800" anchor="t">
+                    <a:lnL w="0" cap="flat" cmpd="sng" algn="ctr">
+                      <a:noFill/>
+                    </a:lnL>
+                    <a:lnR w="0" cap="flat" cmpd="sng" algn="ctr">
+                      <a:noFill/>
+                    </a:lnR>
+                    <a:lnT w="0" cap="flat" cmpd="sng" algn="ctr">
+                      <a:noFill/>
+                    </a:lnT>
+                    <a:lnB w="0" cap="flat" cmpd="sng" algn="ctr">
+                      <a:solidFill>
+                        <a:srgbClr val="FFFFFF"/>
+                      </a:solidFill>
+                      <a:prstDash val="solid"/>
+                      <a:round/>
+                      <a:headEnd type="none" w="med" len="med"/>
+                      <a:tailEnd type="none" w="med" len="med"/>
+                    </a:lnB>
+                  </a:tcPr>
+                </a:tc>
+                <a:tc>
+                  <a:txBody>
+                    <a:bodyPr/>
+                    <a:lstStyle/>
+                    <a:p>
+                      <a:pPr algn="ctr" indent="0" marL="0">
+                        <a:buNone/>
+                      </a:pPr>
+                      <a:r>
+                        <a:rPr lang="en-US" sz="1000" dirty="0">
+                          <a:solidFill>
+                            <a:srgbClr val="1B1A17"/>
+                          </a:solidFill>
+                          <a:latin typeface="Georgia" pitchFamily="34" charset="0"/>
+                          <a:ea typeface="Georgia" pitchFamily="34" charset="-122"/>
+                          <a:cs typeface="Georgia" pitchFamily="34" charset="-120"/>
+                        </a:rPr>
+                        <a:t>+35.9</a:t>
+                      </a:r>
+                      <a:endParaRPr lang="en-US" sz="1000" dirty="0">
+                        <a:latin typeface="Georgia" charset="0"/>
+                        <a:ea typeface="Georgia" charset="0"/>
+                        <a:cs typeface="Georgia" charset="0"/>
+                      </a:endParaRPr>
+                    </a:p>
+                  </a:txBody>
+                  <a:tcPr marL="50800" marR="50800" marT="50800" marB="50800" anchor="t">
+                    <a:lnL w="0" cap="flat" cmpd="sng" algn="ctr">
+                      <a:noFill/>
+                    </a:lnL>
+                    <a:lnR w="0" cap="flat" cmpd="sng" algn="ctr">
+                      <a:noFill/>
+                    </a:lnR>
+                    <a:lnT w="0" cap="flat" cmpd="sng" algn="ctr">
+                      <a:noFill/>
+                    </a:lnT>
+                    <a:lnB w="0" cap="flat" cmpd="sng" algn="ctr">
+                      <a:solidFill>
+                        <a:srgbClr val="FFFFFF"/>
+                      </a:solidFill>
+                      <a:prstDash val="solid"/>
+                      <a:round/>
+                      <a:headEnd type="none" w="med" len="med"/>
+                      <a:tailEnd type="none" w="med" len="med"/>
+                    </a:lnB>
+                  </a:tcPr>
+                </a:tc>
+              </a:tr>
+              <a:tr h="274320">
+                <a:tc>
+                  <a:txBody>
+                    <a:bodyPr/>
+                    <a:lstStyle/>
+                    <a:p>
+                      <a:pPr indent="0" marL="0">
+                        <a:buNone/>
+                      </a:pPr>
+                      <a:r>
+                        <a:rPr lang="en-US" sz="1000" dirty="0">
+                          <a:solidFill>
+                            <a:srgbClr val="1B1A17"/>
+                          </a:solidFill>
+                          <a:latin typeface="Georgia" pitchFamily="34" charset="0"/>
+                          <a:ea typeface="Georgia" pitchFamily="34" charset="-122"/>
+                          <a:cs typeface="Georgia" pitchFamily="34" charset="-120"/>
+                        </a:rPr>
+                        <a:t>thr 0.5</a:t>
+                      </a:r>
+                      <a:endParaRPr lang="en-US" sz="1000" dirty="0">
+                        <a:latin typeface="Georgia" charset="0"/>
+                        <a:ea typeface="Georgia" charset="0"/>
+                        <a:cs typeface="Georgia" charset="0"/>
+                      </a:endParaRPr>
+                    </a:p>
+                  </a:txBody>
+                  <a:tcPr marL="50800" marR="50800" marT="50800" marB="50800" anchor="t">
+                    <a:lnL w="0" cap="flat" cmpd="sng" algn="ctr">
+                      <a:noFill/>
+                    </a:lnL>
+                    <a:lnR w="0" cap="flat" cmpd="sng" algn="ctr">
+                      <a:noFill/>
+                    </a:lnR>
+                    <a:lnT w="0" cap="flat" cmpd="sng" algn="ctr">
+                      <a:noFill/>
+                    </a:lnT>
+                    <a:lnB w="13970" cap="flat" cmpd="sng" algn="ctr">
+                      <a:solidFill>
+                        <a:srgbClr val="1B1A17"/>
+                      </a:solidFill>
+                      <a:prstDash val="solid"/>
+                      <a:round/>
+                      <a:headEnd type="none" w="med" len="med"/>
+                      <a:tailEnd type="none" w="med" len="med"/>
+                    </a:lnB>
+                  </a:tcPr>
+                </a:tc>
+                <a:tc>
+                  <a:txBody>
+                    <a:bodyPr/>
+                    <a:lstStyle/>
+                    <a:p>
+                      <a:pPr algn="ctr" indent="0" marL="0">
+                        <a:buNone/>
+                      </a:pPr>
+                      <a:r>
+                        <a:rPr lang="en-US" sz="1000" dirty="0">
+                          <a:solidFill>
+                            <a:srgbClr val="1B1A17"/>
+                          </a:solidFill>
+                          <a:latin typeface="Georgia" pitchFamily="34" charset="0"/>
+                          <a:ea typeface="Georgia" pitchFamily="34" charset="-122"/>
+                          <a:cs typeface="Georgia" pitchFamily="34" charset="-120"/>
+                        </a:rPr>
+                        <a:t>+24.2</a:t>
+                      </a:r>
+                      <a:endParaRPr lang="en-US" sz="1000" dirty="0">
+                        <a:latin typeface="Georgia" charset="0"/>
+                        <a:ea typeface="Georgia" charset="0"/>
+                        <a:cs typeface="Georgia" charset="0"/>
+                      </a:endParaRPr>
+                    </a:p>
+                  </a:txBody>
+                  <a:tcPr marL="50800" marR="50800" marT="50800" marB="50800" anchor="t">
+                    <a:lnL w="0" cap="flat" cmpd="sng" algn="ctr">
+                      <a:noFill/>
+                    </a:lnL>
+                    <a:lnR w="0" cap="flat" cmpd="sng" algn="ctr">
+                      <a:noFill/>
+                    </a:lnR>
+                    <a:lnT w="0" cap="flat" cmpd="sng" algn="ctr">
+                      <a:noFill/>
+                    </a:lnT>
+                    <a:lnB w="13970" cap="flat" cmpd="sng" algn="ctr">
+                      <a:solidFill>
+                        <a:srgbClr val="1B1A17"/>
+                      </a:solidFill>
+                      <a:prstDash val="solid"/>
+                      <a:round/>
+                      <a:headEnd type="none" w="med" len="med"/>
+                      <a:tailEnd type="none" w="med" len="med"/>
+                    </a:lnB>
+                  </a:tcPr>
+                </a:tc>
+                <a:tc>
+                  <a:txBody>
+                    <a:bodyPr/>
+                    <a:lstStyle/>
+                    <a:p>
+                      <a:pPr algn="ctr" indent="0" marL="0">
+                        <a:buNone/>
+                      </a:pPr>
+                      <a:r>
+                        <a:rPr lang="en-US" sz="1000" dirty="0">
+                          <a:solidFill>
+                            <a:srgbClr val="1B1A17"/>
+                          </a:solidFill>
+                          <a:latin typeface="Georgia" pitchFamily="34" charset="0"/>
+                          <a:ea typeface="Georgia" pitchFamily="34" charset="-122"/>
+                          <a:cs typeface="Georgia" pitchFamily="34" charset="-120"/>
+                        </a:rPr>
+                        <a:t>+32.8</a:t>
+                      </a:r>
+                      <a:endParaRPr lang="en-US" sz="1000" dirty="0">
+                        <a:latin typeface="Georgia" charset="0"/>
+                        <a:ea typeface="Georgia" charset="0"/>
+                        <a:cs typeface="Georgia" charset="0"/>
+                      </a:endParaRPr>
+                    </a:p>
+                  </a:txBody>
+                  <a:tcPr marL="50800" marR="50800" marT="50800" marB="50800" anchor="t">
+                    <a:lnL w="0" cap="flat" cmpd="sng" algn="ctr">
+                      <a:noFill/>
+                    </a:lnL>
+                    <a:lnR w="0" cap="flat" cmpd="sng" algn="ctr">
+                      <a:noFill/>
+                    </a:lnR>
+                    <a:lnT w="0" cap="flat" cmpd="sng" algn="ctr">
+                      <a:noFill/>
+                    </a:lnT>
+                    <a:lnB w="13970" cap="flat" cmpd="sng" algn="ctr">
+                      <a:solidFill>
+                        <a:srgbClr val="1B1A17"/>
+                      </a:solidFill>
+                      <a:prstDash val="solid"/>
+                      <a:round/>
+                      <a:headEnd type="none" w="med" len="med"/>
+                      <a:tailEnd type="none" w="med" len="med"/>
+                    </a:lnB>
+                  </a:tcPr>
+                </a:tc>
+                <a:tc>
+                  <a:txBody>
+                    <a:bodyPr/>
+                    <a:lstStyle/>
+                    <a:p>
+                      <a:pPr algn="ctr" indent="0" marL="0">
+                        <a:buNone/>
+                      </a:pPr>
+                      <a:r>
+                        <a:rPr lang="en-US" sz="1000" dirty="0">
+                          <a:solidFill>
+                            <a:srgbClr val="1B1A17"/>
+                          </a:solidFill>
+                          <a:latin typeface="Georgia" pitchFamily="34" charset="0"/>
+                          <a:ea typeface="Georgia" pitchFamily="34" charset="-122"/>
+                          <a:cs typeface="Georgia" pitchFamily="34" charset="-120"/>
+                        </a:rPr>
+                        <a:t>+36.2</a:t>
+                      </a:r>
+                      <a:endParaRPr lang="en-US" sz="1000" dirty="0">
+                        <a:latin typeface="Georgia" charset="0"/>
+                        <a:ea typeface="Georgia" charset="0"/>
+                        <a:cs typeface="Georgia" charset="0"/>
+                      </a:endParaRPr>
+                    </a:p>
+                  </a:txBody>
+                  <a:tcPr marL="50800" marR="50800" marT="50800" marB="50800" anchor="t">
+                    <a:lnL w="0" cap="flat" cmpd="sng" algn="ctr">
+                      <a:noFill/>
+                    </a:lnL>
+                    <a:lnR w="0" cap="flat" cmpd="sng" algn="ctr">
+                      <a:noFill/>
+                    </a:lnR>
+                    <a:lnT w="0" cap="flat" cmpd="sng" algn="ctr">
+                      <a:noFill/>
+                    </a:lnT>
+                    <a:lnB w="13970" cap="flat" cmpd="sng" algn="ctr">
+                      <a:solidFill>
+                        <a:srgbClr val="1B1A17"/>
+                      </a:solidFill>
+                      <a:prstDash val="solid"/>
+                      <a:round/>
+                      <a:headEnd type="none" w="med" len="med"/>
+                      <a:tailEnd type="none" w="med" len="med"/>
+                    </a:lnB>
+                  </a:tcPr>
+                </a:tc>
+                <a:tc>
+                  <a:txBody>
+                    <a:bodyPr/>
+                    <a:lstStyle/>
+                    <a:p>
+                      <a:pPr algn="ctr" indent="0" marL="0">
+                        <a:buNone/>
+                      </a:pPr>
+                      <a:r>
+                        <a:rPr lang="en-US" sz="1000" dirty="0">
+                          <a:solidFill>
+                            <a:srgbClr val="1B1A17"/>
+                          </a:solidFill>
+                          <a:latin typeface="Georgia" pitchFamily="34" charset="0"/>
+                          <a:ea typeface="Georgia" pitchFamily="34" charset="-122"/>
+                          <a:cs typeface="Georgia" pitchFamily="34" charset="-120"/>
+                        </a:rPr>
+                        <a:t>+38.4</a:t>
+                      </a:r>
+                      <a:endParaRPr lang="en-US" sz="1000" dirty="0">
+                        <a:latin typeface="Georgia" charset="0"/>
+                        <a:ea typeface="Georgia" charset="0"/>
+                        <a:cs typeface="Georgia" charset="0"/>
+                      </a:endParaRPr>
+                    </a:p>
+                  </a:txBody>
+                  <a:tcPr marL="50800" marR="50800" marT="50800" marB="50800" anchor="t">
+                    <a:lnL w="0" cap="flat" cmpd="sng" algn="ctr">
+                      <a:noFill/>
+                    </a:lnL>
+                    <a:lnR w="0" cap="flat" cmpd="sng" algn="ctr">
+                      <a:noFill/>
+                    </a:lnR>
+                    <a:lnT w="0" cap="flat" cmpd="sng" algn="ctr">
+                      <a:noFill/>
+                    </a:lnT>
+                    <a:lnB w="13970" cap="flat" cmpd="sng" algn="ctr">
+                      <a:solidFill>
+                        <a:srgbClr val="1B1A17"/>
+                      </a:solidFill>
+                      <a:prstDash val="solid"/>
+                      <a:round/>
+                      <a:headEnd type="none" w="med" len="med"/>
+                      <a:tailEnd type="none" w="med" len="med"/>
+                    </a:lnB>
+                  </a:tcPr>
+                </a:tc>
+                <a:tc>
+                  <a:txBody>
+                    <a:bodyPr/>
+                    <a:lstStyle/>
+                    <a:p>
+                      <a:pPr algn="ctr" indent="0" marL="0">
+                        <a:buNone/>
+                      </a:pPr>
+                      <a:r>
+                        <a:rPr lang="en-US" sz="1000" dirty="0">
+                          <a:solidFill>
+                            <a:srgbClr val="1B1A17"/>
+                          </a:solidFill>
+                          <a:latin typeface="Georgia" pitchFamily="34" charset="0"/>
+                          <a:ea typeface="Georgia" pitchFamily="34" charset="-122"/>
+                          <a:cs typeface="Georgia" pitchFamily="34" charset="-120"/>
+                        </a:rPr>
+                        <a:t>+37.9</a:t>
+                      </a:r>
+                      <a:endParaRPr lang="en-US" sz="1000" dirty="0">
+                        <a:latin typeface="Georgia" charset="0"/>
+                        <a:ea typeface="Georgia" charset="0"/>
+                        <a:cs typeface="Georgia" charset="0"/>
+                      </a:endParaRPr>
+                    </a:p>
+                  </a:txBody>
+                  <a:tcPr marL="50800" marR="50800" marT="50800" marB="50800" anchor="t">
+                    <a:lnL w="0" cap="flat" cmpd="sng" algn="ctr">
+                      <a:noFill/>
+                    </a:lnL>
+                    <a:lnR w="0" cap="flat" cmpd="sng" algn="ctr">
+                      <a:noFill/>
+                    </a:lnR>
+                    <a:lnT w="0" cap="flat" cmpd="sng" algn="ctr">
+                      <a:noFill/>
+                    </a:lnT>
+                    <a:lnB w="13970" cap="flat" cmpd="sng" algn="ctr">
+                      <a:solidFill>
+                        <a:srgbClr val="1B1A17"/>
+                      </a:solidFill>
+                      <a:prstDash val="solid"/>
+                      <a:round/>
+                      <a:headEnd type="none" w="med" len="med"/>
+                      <a:tailEnd type="none" w="med" len="med"/>
+                    </a:lnB>
+                  </a:tcPr>
+                </a:tc>
+              </a:tr>
+            </a:tbl>
+          </a:graphicData>
+        </a:graphic>
+      </p:graphicFrame>
+      <p:sp>
+        <p:nvSpPr>
+          <p:cNvPr id="11" name="Text 7"/>
+          <p:cNvSpPr/>
+          <p:nvPr/>
+        </p:nvSpPr>
+        <p:spPr>
+          <a:xfrm>
+            <a:off x="777240" y="6263640"/>
+            <a:ext cx="10637215" cy="365760"/>
+          </a:xfrm>
+          <a:prstGeom prst="rect">
+            <a:avLst/>
+          </a:prstGeom>
+          <a:noFill/>
+          <a:ln/>
+        </p:spPr>
+        <p:txBody>
+          <a:bodyPr wrap="square" lIns="0" tIns="0" rIns="0" bIns="0" rtlCol="0" anchor="ctr"/>
+          <a:lstStyle/>
+          <a:p>
+            <a:pPr indent="0" marL="0">
+              <a:buNone/>
+            </a:pPr>
+            <a:r>
+              <a:rPr lang="en-US" sz="1050" dirty="0">
+                <a:solidFill>
+                  <a:srgbClr val="6B6963"/>
+                </a:solidFill>
+                <a:latin typeface="Georgia" pitchFamily="34" charset="0"/>
+                <a:ea typeface="Georgia" pitchFamily="34" charset="-122"/>
+                <a:cs typeface="Georgia" pitchFamily="34" charset="-120"/>
+              </a:rPr>
+              <a:t>Optimal dilation rises with threshold — 16, 32, 48, 48 px. Sweeping dilation alone found a local optimum on one slice. The peak is interior on both axes.</a:t>
+            </a:r>
+            <a:endParaRPr lang="en-US" sz="1050" dirty="0"/>
+          </a:p>
+        </p:txBody>
+      </p:sp>
+    </p:spTree>
+  </p:cSld>
+  <p:clrMapOvr>
+    <a:masterClrMapping/>
+  </p:clrMapOvr>
+</p:sld>
+</file>
+
+<file path=ppt/slides/slide12.xml><?xml version="1.0" encoding="utf-8"?>
+<p:sld xmlns:a="http://schemas.openxmlformats.org/drawingml/2006/main" xmlns:r="http://schemas.openxmlformats.org/officeDocument/2006/relationships" xmlns:p="http://schemas.openxmlformats.org/presentationml/2006/main">
+  <p:cSld name="Slide 12">
+    <p:bg>
+      <p:bgPr>
+        <a:solidFill>
+          <a:srgbClr val="FDFDFC"/>
+        </a:solidFill>
+      </p:bgPr>
+    </p:bg>
+    <p:spTree>
+      <p:nvGrpSpPr>
+        <p:cNvPr id="1" name=""/>
+        <p:cNvGrpSpPr/>
+        <p:nvPr/>
+      </p:nvGrpSpPr>
+      <p:grpSpPr>
+        <a:xfrm>
+          <a:off x="0" y="0"/>
+          <a:ext cx="0" cy="0"/>
+          <a:chOff x="0" y="0"/>
+          <a:chExt cx="0" cy="0"/>
+        </a:xfrm>
+      </p:grpSpPr>
+      <p:sp>
+        <p:nvSpPr>
+          <p:cNvPr id="2" name="Text 0"/>
+          <p:cNvSpPr/>
+          <p:nvPr/>
+        </p:nvSpPr>
+        <p:spPr>
+          <a:xfrm>
+            <a:off x="777240" y="365760"/>
+            <a:ext cx="10637215" cy="201168"/>
+          </a:xfrm>
+          <a:prstGeom prst="rect">
+            <a:avLst/>
+          </a:prstGeom>
+          <a:noFill/>
+          <a:ln/>
+        </p:spPr>
+        <p:txBody>
+          <a:bodyPr wrap="square" lIns="0" tIns="0" rIns="0" bIns="0" rtlCol="0" anchor="ctr"/>
+          <a:lstStyle/>
+          <a:p>
+            <a:pPr indent="0" marL="0">
+              <a:buNone/>
+            </a:pPr>
+            <a:r>
+              <a:rPr lang="en-US" sz="1050" spc="70" kern="0" dirty="0">
+                <a:solidFill>
+                  <a:srgbClr val="6B6963"/>
+                </a:solidFill>
+                <a:latin typeface="Georgia" pitchFamily="34" charset="0"/>
+                <a:ea typeface="Georgia" pitchFamily="34" charset="-122"/>
+                <a:cs typeface="Georgia" pitchFamily="34" charset="-120"/>
+              </a:rPr>
               <a:t>What we checked on ourselves</a:t>
             </a:r>
             <a:endParaRPr lang="en-US" sz="1050" dirty="0"/>
@@ -4266,7 +7204,7 @@
       </p:sp>
       <p:graphicFrame>
         <p:nvGraphicFramePr>
-          <p:cNvPr id="12" name="Table 0"/>
+          <p:cNvPr id="13" name="Table 0"/>
           <p:cNvGraphicFramePr>
             <a:graphicFrameLocks noGrp="1"/>
           </p:cNvGraphicFramePr>
@@ -5222,9 +8160,9 @@
 </p:sld>
 </file>
 
-<file path=ppt/slides/slide12.xml><?xml version="1.0" encoding="utf-8"?>
+<file path=ppt/slides/slide13.xml><?xml version="1.0" encoding="utf-8"?>
 <p:sld xmlns:a="http://schemas.openxmlformats.org/drawingml/2006/main" xmlns:r="http://schemas.openxmlformats.org/officeDocument/2006/relationships" xmlns:p="http://schemas.openxmlformats.org/presentationml/2006/main">
-  <p:cSld name="Slide 12">
+  <p:cSld name="Slide 13">
     <p:bg>
       <p:bgPr>
         <a:solidFill>
@@ -5346,7 +8284,7 @@
       </p:sp>
       <p:graphicFrame>
         <p:nvGraphicFramePr>
-          <p:cNvPr id="13" name="Table 0"/>
+          <p:cNvPr id="14" name="Table 0"/>
           <p:cNvGraphicFramePr>
             <a:graphicFrameLocks noGrp="1"/>
           </p:cNvGraphicFramePr>
@@ -6201,7 +9139,7 @@
       </p:sp>
       <p:graphicFrame>
         <p:nvGraphicFramePr>
-          <p:cNvPr id="25" name="Table 1"/>
+          <p:cNvPr id="27" name="Table 1"/>
           <p:cNvGraphicFramePr>
             <a:graphicFrameLocks noGrp="1"/>
           </p:cNvGraphicFramePr>
@@ -6633,9 +9571,9 @@
 </p:sld>
 </file>
 
-<file path=ppt/slides/slide13.xml><?xml version="1.0" encoding="utf-8"?>
+<file path=ppt/slides/slide14.xml><?xml version="1.0" encoding="utf-8"?>
 <p:sld xmlns:a="http://schemas.openxmlformats.org/drawingml/2006/main" xmlns:r="http://schemas.openxmlformats.org/officeDocument/2006/relationships" xmlns:p="http://schemas.openxmlformats.org/presentationml/2006/main">
-  <p:cSld name="Slide 13">
+  <p:cSld name="Slide 14">
     <p:bg>
       <p:bgPr>
         <a:solidFill>

--- a/docs/ISE_Review1_Final.pptx
+++ b/docs/ISE_Review1_Final.pptx
@@ -5509,7 +5509,7 @@
                 <a:ea typeface="Georgia" pitchFamily="34" charset="-122"/>
                 <a:cs typeface="Georgia" pitchFamily="34" charset="-120"/>
               </a:rPr>
-              <a:t> whole-frame editing's 24.2%, so we win on both quantities rather than trading one for the other.</a:t>
+              <a:t> whole-frame editing's 24.2%, so we win on both quantities rather than trading one for the other. The oracle at +53.0% bounds what a perfect region would buy.</a:t>
             </a:r>
             <a:endParaRPr lang="en-US" sz="1150" dirty="0"/>
           </a:p>
@@ -21585,10 +21585,10 @@
             <a:tbl>
               <a:tblPr/>
               <a:tblGrid>
-                <a:gridCol w="1143000"/>
-                <a:gridCol w="2039112"/>
+                <a:gridCol w="1097280"/>
+                <a:gridCol w="2084832"/>
               </a:tblGrid>
-              <a:tr h="822960">
+              <a:tr h="676656">
                 <a:tc>
                   <a:txBody>
                     <a:bodyPr/>
@@ -21598,7 +21598,7 @@
                         <a:buNone/>
                       </a:pPr>
                       <a:r>
-                        <a:rPr lang="en-US" sz="900" b="1" dirty="0">
+                        <a:rPr lang="en-US" sz="850" b="1" dirty="0">
                           <a:solidFill>
                             <a:srgbClr val="1B1A17"/>
                           </a:solidFill>
@@ -21608,7 +21608,7 @@
                         </a:rPr>
                         <a:t>Overfits fast</a:t>
                       </a:r>
-                      <a:endParaRPr lang="en-US" sz="900" dirty="0">
+                      <a:endParaRPr lang="en-US" sz="850" dirty="0">
                         <a:latin typeface="Georgia" charset="0"/>
                         <a:ea typeface="Georgia" charset="0"/>
                         <a:cs typeface="Georgia" charset="0"/>
@@ -21651,7 +21651,7 @@
                         <a:buNone/>
                       </a:pPr>
                       <a:r>
-                        <a:rPr lang="en-US" sz="900" b="1" dirty="0">
+                        <a:rPr lang="en-US" sz="850" b="1" dirty="0">
                           <a:solidFill>
                             <a:srgbClr val="1B1A17"/>
                           </a:solidFill>
@@ -21661,7 +21661,7 @@
                         </a:rPr>
                         <a:t>validation IoU peaks at epoch 2–7 then halves by epoch 60, while training loss falls throughout</a:t>
                       </a:r>
-                      <a:endParaRPr lang="en-US" sz="900" dirty="0">
+                      <a:endParaRPr lang="en-US" sz="850" dirty="0">
                         <a:latin typeface="Georgia" charset="0"/>
                         <a:ea typeface="Georgia" charset="0"/>
                         <a:cs typeface="Georgia" charset="0"/>
@@ -21696,7 +21696,7 @@
                   </a:tcPr>
                 </a:tc>
               </a:tr>
-              <a:tr h="822960">
+              <a:tr h="676656">
                 <a:tc>
                   <a:txBody>
                     <a:bodyPr/>
@@ -21706,7 +21706,7 @@
                         <a:buNone/>
                       </a:pPr>
                       <a:r>
-                        <a:rPr lang="en-US" sz="900" dirty="0">
+                        <a:rPr lang="en-US" sz="850" dirty="0">
                           <a:solidFill>
                             <a:srgbClr val="1B1A17"/>
                           </a:solidFill>
@@ -21716,7 +21716,7 @@
                         </a:rPr>
                         <a:t>Selection saved it</a:t>
                       </a:r>
-                      <a:endParaRPr lang="en-US" sz="900" dirty="0">
+                      <a:endParaRPr lang="en-US" sz="850" dirty="0">
                         <a:latin typeface="Georgia" charset="0"/>
                         <a:ea typeface="Georgia" charset="0"/>
                         <a:cs typeface="Georgia" charset="0"/>
@@ -21753,7 +21753,7 @@
                         <a:buNone/>
                       </a:pPr>
                       <a:r>
-                        <a:rPr lang="en-US" sz="900" dirty="0">
+                        <a:rPr lang="en-US" sz="850" dirty="0">
                           <a:solidFill>
                             <a:srgbClr val="1B1A17"/>
                           </a:solidFill>
@@ -21763,7 +21763,7 @@
                         </a:rPr>
                         <a:t>choosing on a held-out train slice is why the reported numbers hold; the last epoch would have reported half</a:t>
                       </a:r>
-                      <a:endParaRPr lang="en-US" sz="900" dirty="0">
+                      <a:endParaRPr lang="en-US" sz="850" dirty="0">
                         <a:latin typeface="Georgia" charset="0"/>
                         <a:ea typeface="Georgia" charset="0"/>
                         <a:cs typeface="Georgia" charset="0"/>
@@ -21792,7 +21792,7 @@
                   </a:tcPr>
                 </a:tc>
               </a:tr>
-              <a:tr h="822960">
+              <a:tr h="676656">
                 <a:tc>
                   <a:txBody>
                     <a:bodyPr/>
@@ -21802,7 +21802,7 @@
                         <a:buNone/>
                       </a:pPr>
                       <a:r>
-                        <a:rPr lang="en-US" sz="900" dirty="0">
+                        <a:rPr lang="en-US" sz="850" dirty="0">
                           <a:solidFill>
                             <a:srgbClr val="1B1A17"/>
                           </a:solidFill>
@@ -21812,7 +21812,7 @@
                         </a:rPr>
                         <a:t>Language is real</a:t>
                       </a:r>
-                      <a:endParaRPr lang="en-US" sz="900" dirty="0">
+                      <a:endParaRPr lang="en-US" sz="850" dirty="0">
                         <a:latin typeface="Georgia" charset="0"/>
                         <a:ea typeface="Georgia" charset="0"/>
                         <a:cs typeface="Georgia" charset="0"/>
@@ -21849,7 +21849,7 @@
                         <a:buNone/>
                       </a:pPr>
                       <a:r>
-                        <a:rPr lang="en-US" sz="900" dirty="0">
+                        <a:rPr lang="en-US" sz="850" dirty="0">
                           <a:solidFill>
                             <a:srgbClr val="1B1A17"/>
                           </a:solidFill>
@@ -21859,7 +21859,7 @@
                         </a:rPr>
                         <a:t>zeroing the instruction collapses IoU from 0.188 to ~0.03 — a gap of +0.158</a:t>
                       </a:r>
-                      <a:endParaRPr lang="en-US" sz="900" dirty="0">
+                      <a:endParaRPr lang="en-US" sz="850" dirty="0">
                         <a:latin typeface="Georgia" charset="0"/>
                         <a:ea typeface="Georgia" charset="0"/>
                         <a:cs typeface="Georgia" charset="0"/>
@@ -21888,7 +21888,7 @@
                   </a:tcPr>
                 </a:tc>
               </a:tr>
-              <a:tr h="822960">
+              <a:tr h="676656">
                 <a:tc>
                   <a:txBody>
                     <a:bodyPr/>
@@ -21898,7 +21898,7 @@
                         <a:buNone/>
                       </a:pPr>
                       <a:r>
-                        <a:rPr lang="en-US" sz="900" dirty="0">
+                        <a:rPr lang="en-US" sz="850" dirty="0">
                           <a:solidFill>
                             <a:srgbClr val="1B1A17"/>
                           </a:solidFill>
@@ -21908,7 +21908,103 @@
                         </a:rPr>
                         <a:t>Reproducible</a:t>
                       </a:r>
-                      <a:endParaRPr lang="en-US" sz="900" dirty="0">
+                      <a:endParaRPr lang="en-US" sz="850" dirty="0">
+                        <a:latin typeface="Georgia" charset="0"/>
+                        <a:ea typeface="Georgia" charset="0"/>
+                        <a:cs typeface="Georgia" charset="0"/>
+                      </a:endParaRPr>
+                    </a:p>
+                  </a:txBody>
+                  <a:tcPr marL="50800" marR="50800" marT="50800" marB="50800" anchor="t">
+                    <a:lnL w="0" cap="flat" cmpd="sng" algn="ctr">
+                      <a:noFill/>
+                    </a:lnL>
+                    <a:lnR w="0" cap="flat" cmpd="sng" algn="ctr">
+                      <a:noFill/>
+                    </a:lnR>
+                    <a:lnT w="0" cap="flat" cmpd="sng" algn="ctr">
+                      <a:noFill/>
+                    </a:lnT>
+                    <a:lnB w="0" cap="flat" cmpd="sng" algn="ctr">
+                      <a:solidFill>
+                        <a:srgbClr val="FFFFFF"/>
+                      </a:solidFill>
+                      <a:prstDash val="solid"/>
+                      <a:round/>
+                      <a:headEnd type="none" w="med" len="med"/>
+                      <a:tailEnd type="none" w="med" len="med"/>
+                    </a:lnB>
+                  </a:tcPr>
+                </a:tc>
+                <a:tc>
+                  <a:txBody>
+                    <a:bodyPr/>
+                    <a:lstStyle/>
+                    <a:p>
+                      <a:pPr indent="0" marL="0">
+                        <a:buNone/>
+                      </a:pPr>
+                      <a:r>
+                        <a:rPr lang="en-US" sz="850" dirty="0">
+                          <a:solidFill>
+                            <a:srgbClr val="1B1A17"/>
+                          </a:solidFill>
+                          <a:latin typeface="Georgia" pitchFamily="34" charset="0"/>
+                          <a:ea typeface="Georgia" pitchFamily="34" charset="-122"/>
+                          <a:cs typeface="Georgia" pitchFamily="34" charset="-120"/>
+                        </a:rPr>
+                        <a:t>all 6 curve seeds reproduced their 12-seed dev IoU exactly, to four decimals</a:t>
+                      </a:r>
+                      <a:endParaRPr lang="en-US" sz="850" dirty="0">
+                        <a:latin typeface="Georgia" charset="0"/>
+                        <a:ea typeface="Georgia" charset="0"/>
+                        <a:cs typeface="Georgia" charset="0"/>
+                      </a:endParaRPr>
+                    </a:p>
+                  </a:txBody>
+                  <a:tcPr marL="50800" marR="50800" marT="50800" marB="50800" anchor="t">
+                    <a:lnL w="0" cap="flat" cmpd="sng" algn="ctr">
+                      <a:noFill/>
+                    </a:lnL>
+                    <a:lnR w="0" cap="flat" cmpd="sng" algn="ctr">
+                      <a:noFill/>
+                    </a:lnR>
+                    <a:lnT w="0" cap="flat" cmpd="sng" algn="ctr">
+                      <a:noFill/>
+                    </a:lnT>
+                    <a:lnB w="0" cap="flat" cmpd="sng" algn="ctr">
+                      <a:solidFill>
+                        <a:srgbClr val="FFFFFF"/>
+                      </a:solidFill>
+                      <a:prstDash val="solid"/>
+                      <a:round/>
+                      <a:headEnd type="none" w="med" len="med"/>
+                      <a:tailEnd type="none" w="med" len="med"/>
+                    </a:lnB>
+                  </a:tcPr>
+                </a:tc>
+              </a:tr>
+              <a:tr h="676656">
+                <a:tc>
+                  <a:txBody>
+                    <a:bodyPr/>
+                    <a:lstStyle/>
+                    <a:p>
+                      <a:pPr indent="0" marL="0">
+                        <a:buNone/>
+                      </a:pPr>
+                      <a:r>
+                        <a:rPr lang="en-US" sz="850" dirty="0">
+                          <a:solidFill>
+                            <a:srgbClr val="1B1A17"/>
+                          </a:solidFill>
+                          <a:latin typeface="Georgia" pitchFamily="34" charset="0"/>
+                          <a:ea typeface="Georgia" pitchFamily="34" charset="-122"/>
+                          <a:cs typeface="Georgia" pitchFamily="34" charset="-120"/>
+                        </a:rPr>
+                        <a:t>Headroom is bounded</a:t>
+                      </a:r>
+                      <a:endParaRPr lang="en-US" sz="850" dirty="0">
                         <a:latin typeface="Georgia" charset="0"/>
                         <a:ea typeface="Georgia" charset="0"/>
                         <a:cs typeface="Georgia" charset="0"/>
@@ -21945,17 +22041,17 @@
                         <a:buNone/>
                       </a:pPr>
                       <a:r>
-                        <a:rPr lang="en-US" sz="900" dirty="0">
-                          <a:solidFill>
-                            <a:srgbClr val="1B1A17"/>
-                          </a:solidFill>
-                          <a:latin typeface="Georgia" pitchFamily="34" charset="0"/>
-                          <a:ea typeface="Georgia" pitchFamily="34" charset="-122"/>
-                          <a:cs typeface="Georgia" pitchFamily="34" charset="-120"/>
-                        </a:rPr>
-                        <a:t>all 6 curve seeds reproduced their 12-seed dev IoU exactly, to four decimals</a:t>
-                      </a:r>
-                      <a:endParaRPr lang="en-US" sz="900" dirty="0">
+                        <a:rPr lang="en-US" sz="850" dirty="0">
+                          <a:solidFill>
+                            <a:srgbClr val="1B1A17"/>
+                          </a:solidFill>
+                          <a:latin typeface="Georgia" pitchFamily="34" charset="0"/>
+                          <a:ea typeface="Georgia" pitchFamily="34" charset="-122"/>
+                          <a:cs typeface="Georgia" pitchFamily="34" charset="-120"/>
+                        </a:rPr>
+                        <a:t>least squares caps ANY predictor over this basis at 0.2119 insert / 0.3867 modify / 0.4325 remove — we reach 56% / 60% / 46%</a:t>
+                      </a:r>
+                      <a:endParaRPr lang="en-US" sz="850" dirty="0">
                         <a:latin typeface="Georgia" charset="0"/>
                         <a:ea typeface="Georgia" charset="0"/>
                         <a:cs typeface="Georgia" charset="0"/>
